--- a/AI_Assisted_API_Integration_Factory.pptx
+++ b/AI_Assisted_API_Integration_Factory.pptx
@@ -16,11 +16,6 @@
     <p:sldId id="264" r:id="rId15"/>
     <p:sldId id="265" r:id="rId16"/>
     <p:sldId id="266" r:id="rId17"/>
-    <p:sldId id="268" r:id="rId19"/>
-    <p:sldId id="269" r:id="rId20"/>
-    <p:sldId id="270" r:id="rId21"/>
-    <p:sldId id="271" r:id="rId22"/>
-    <p:sldId id="272" r:id="rId23"/>
     <p:sldId id="267" r:id="rId18"/>
   </p:sldIdLst>
   <p:sldSz cx="12191695" cy="6858000" type="screen4x3"/>
@@ -535,7 +530,7 @@
           <a:p/>
           <a:p>
             <a:r>
-              <a:t>I'll do about seven minutes of slides, then hand a single instruction to an orchestrator agent and let it run the whole thing while we watch.</a:t>
+              <a:t>This is about twelve minutes of slides. Everything I describe is real and runs: the repo is public on GitHub, the link is on the last slide, and its README walks through the whole thing step by step, so anyone can replay it after this.</a:t>
             </a:r>
           </a:p>
         </p:txBody>
@@ -605,7 +600,7 @@
           <a:lstStyle/>
           <a:p>
             <a:r>
-              <a:t>[9:30 — 30 s — optional, skip if behind]</a:t>
+              <a:t>[9:30 — 45 s]</a:t>
             </a:r>
           </a:p>
           <a:p>
@@ -680,12 +675,12 @@
           <a:lstStyle/>
           <a:p>
             <a:r>
-              <a:t>[10:00 — 30 s — optional, skip if behind]</a:t>
-            </a:r>
-          </a:p>
-          <a:p>
-            <a:r>
-              <a:t>If you want to try this, pick one connector. Start small, with sandbox access so the smoke gate is real. Measure four things: time to the first working call, hours spent, how much of the AI-written code survived review, and bugs found afterwards. Two weeks on one connector is enough to know whether it pays off. Now the demo.</a:t>
+              <a:t>[10:15 — 45 s]</a:t>
+            </a:r>
+          </a:p>
+          <a:p>
+            <a:r>
+              <a:t>If you want to try this, pick one connector. Start small, with sandbox access so the smoke gate is real. Measure four things: time to the first working call, hours spent, how much of the AI-written code survived review, and bugs found afterwards. Two weeks on one connector is enough to know whether it pays off.</a:t>
             </a:r>
           </a:p>
         </p:txBody>
@@ -755,453 +750,24 @@
           <a:lstStyle/>
           <a:p>
             <a:r>
-              <a:t>[10:30 — 30 s — DEMO OVERVIEW]</a:t>
-            </a:r>
-          </a:p>
-          <a:p>
-            <a:r>
-              <a:t>Here is what the next six minutes look like. I am not going to type commands. I will give an orchestrator agent one instruction. It will run the whole journey — import, mapping, generation, implementation, validation — calling two other agents on the way, and it will stop exactly once: when it needs a business decision. That decision is yours, not mine. Then I will hand it a second instruction that sets a trap, and we will watch what it does with it.</a:t>
+              <a:t>[11:00 — 1 min 30 s]</a:t>
+            </a:r>
+          </a:p>
+          <a:p>
+            <a:r>
+              <a:t>Three things to take away. The CLI builds the house, which is where consistency comes from. The AI furnishes the rooms inside guardrails, which is where the speed comes from. Gates and review keep us accountable, which is where the confidence comes from.</a:t>
             </a:r>
           </a:p>
           <a:p/>
           <a:p>
             <a:r>
-              <a:t>Why the Star Wars API: it has no authentication, so it is good for a demo, and it is full of numbers stored as strings, years with letters in them, and URLs where you would expect ids. Mapping it is a real test. The next four slides are the exact text I paste, so anyone can replay this.</a:t>
-            </a:r>
-          </a:p>
-        </p:txBody>
-      </p:sp>
-      <p:sp>
-        <p:nvSpPr>
-          <p:cNvPr id="4" name="Slide Number Placeholder 3"/>
-          <p:cNvSpPr>
-            <a:spLocks noGrp="1"/>
-          </p:cNvSpPr>
-          <p:nvPr>
-            <p:ph type="sldNum" idx="5" sz="quarter"/>
-          </p:nvPr>
-        </p:nvSpPr>
-        <p:spPr/>
-      </p:sp>
-    </p:spTree>
-  </p:cSld>
-  <p:clrMapOvr>
-    <a:masterClrMapping/>
-  </p:clrMapOvr>
-</p:notes>
-</file>
-
-<file path=ppt/notesSlides/notesSlide13.xml><?xml version="1.0" encoding="utf-8"?>
-<p:notes xmlns:a="http://schemas.openxmlformats.org/drawingml/2006/main" xmlns:p="http://schemas.openxmlformats.org/presentationml/2006/main" xmlns:r="http://schemas.openxmlformats.org/officeDocument/2006/relationships">
-  <p:cSld>
-    <p:spTree>
-      <p:nvGrpSpPr>
-        <p:cNvPr id="1" name=""/>
-        <p:cNvGrpSpPr/>
-        <p:nvPr/>
-      </p:nvGrpSpPr>
-      <p:grpSpPr>
-        <a:xfrm>
-          <a:off x="0" y="0"/>
-          <a:ext cx="0" cy="0"/>
-          <a:chOff x="0" y="0"/>
-          <a:chExt cx="0" cy="0"/>
-        </a:xfrm>
-      </p:grpSpPr>
-      <p:sp>
-        <p:nvSpPr>
-          <p:cNvPr id="2" name="Slide Image Placeholder 1"/>
-          <p:cNvSpPr>
-            <a:spLocks noGrp="1"/>
-          </p:cNvSpPr>
-          <p:nvPr>
-            <p:ph type="sldImg" idx="2"/>
-          </p:nvPr>
-        </p:nvSpPr>
-        <p:spPr/>
-      </p:sp>
-      <p:sp>
-        <p:nvSpPr>
-          <p:cNvPr id="3" name="Notes Placeholder 2"/>
-          <p:cNvSpPr>
-            <a:spLocks noGrp="1"/>
-          </p:cNvSpPr>
-          <p:nvPr>
-            <p:ph type="body" idx="3" sz="quarter"/>
-          </p:nvPr>
-        </p:nvSpPr>
-        <p:spPr/>
-        <p:txBody>
-          <a:bodyPr/>
-          <a:lstStyle/>
-          <a:p>
-            <a:r>
-              <a:t>[11:00 — done before the room arrives — DEMO STEP 1]</a:t>
-            </a:r>
-          </a:p>
-          <a:p>
-            <a:r>
-              <a:t>This slide is for you, not the room; flip past it quickly or skip it. Before the session, run reset with the demo checkpoint. That wipes the generated code, restores two operations that are already finished and green, and strips getCharacter back to "no mapping, TODO blocks", so one operation goes through the whole journey live with two agent calls. If you want to be sure, run map --check yourself and confirm it prints two approved rows and one missing — but do that before anyone is watching, because the orchestrator's first move is to run the same check, and the room should see it come from the agent.</a:t>
+              <a:t>None of this needed a new platform. The CLI is a small .NET tool, the agents are markdown files in the .github folder, and the gates are a script CI already runs. The investment is in the manifest, the mapping files and the policy — the parts that make the next connector cheaper than this one.</a:t>
             </a:r>
           </a:p>
           <a:p/>
           <a:p>
             <a:r>
-              <a:t>Have VS Code open in Copilot agent mode with the terminal visible, and a browser tab on the C-3PO record, because that record is the one that produces the question.</a:t>
-            </a:r>
-          </a:p>
-        </p:txBody>
-      </p:sp>
-      <p:sp>
-        <p:nvSpPr>
-          <p:cNvPr id="4" name="Slide Number Placeholder 3"/>
-          <p:cNvSpPr>
-            <a:spLocks noGrp="1"/>
-          </p:cNvSpPr>
-          <p:nvPr>
-            <p:ph type="sldNum" idx="5" sz="quarter"/>
-          </p:nvPr>
-        </p:nvSpPr>
-        <p:spPr/>
-      </p:sp>
-    </p:spTree>
-  </p:cSld>
-  <p:clrMapOvr>
-    <a:masterClrMapping/>
-  </p:clrMapOvr>
-</p:notes>
-</file>
-
-<file path=ppt/notesSlides/notesSlide14.xml><?xml version="1.0" encoding="utf-8"?>
-<p:notes xmlns:a="http://schemas.openxmlformats.org/drawingml/2006/main" xmlns:p="http://schemas.openxmlformats.org/presentationml/2006/main" xmlns:r="http://schemas.openxmlformats.org/officeDocument/2006/relationships">
-  <p:cSld>
-    <p:spTree>
-      <p:nvGrpSpPr>
-        <p:cNvPr id="1" name=""/>
-        <p:cNvGrpSpPr/>
-        <p:nvPr/>
-      </p:nvGrpSpPr>
-      <p:grpSpPr>
-        <a:xfrm>
-          <a:off x="0" y="0"/>
-          <a:ext cx="0" cy="0"/>
-          <a:chOff x="0" y="0"/>
-          <a:chExt cx="0" cy="0"/>
-        </a:xfrm>
-      </p:grpSpPr>
-      <p:sp>
-        <p:nvSpPr>
-          <p:cNvPr id="2" name="Slide Image Placeholder 1"/>
-          <p:cNvSpPr>
-            <a:spLocks noGrp="1"/>
-          </p:cNvSpPr>
-          <p:nvPr>
-            <p:ph type="sldImg" idx="2"/>
-          </p:nvPr>
-        </p:nvSpPr>
-        <p:spPr/>
-      </p:sp>
-      <p:sp>
-        <p:nvSpPr>
-          <p:cNvPr id="3" name="Notes Placeholder 2"/>
-          <p:cNvSpPr>
-            <a:spLocks noGrp="1"/>
-          </p:cNvSpPr>
-          <p:nvPr>
-            <p:ph type="body" idx="3" sz="quarter"/>
-          </p:nvPr>
-        </p:nvSpPr>
-        <p:spPr/>
-        <p:txBody>
-          <a:bodyPr/>
-          <a:lstStyle/>
-          <a:p>
-            <a:r>
-              <a:t>[11:00 — 1 min 30 s — DEMO STEP 2]</a:t>
-            </a:r>
-          </a:p>
-          <a:p>
-            <a:r>
-              <a:t>Paste the prompt and take your hands off the keyboard. Narrate the terminal as it moves.</a:t>
-            </a:r>
-          </a:p>
-          <a:p/>
-          <a:p>
-            <a:r>
-              <a:t>The first thing the orchestrator does is run map --check and report that two operations are approved and getCharacter is missing. Say: "it reads state from the tool; it doesn't assume." Then it runs import, which regenerates the client and our models — a thousand lines of plumbing rebuilt in a second. Then it runs map for getCharacter, which writes a 1,400-token brief, and it hands that brief to the mapping agent. That call takes thirty to sixty seconds; while it runs, show the C-3PO tab and say "this record is about to become a question."</a:t>
-            </a:r>
-          </a:p>
-          <a:p/>
-          <a:p>
-            <a:r>
-              <a:t>When the mapping agent returns, the orchestrator runs map --check again. This time it prints two low-confidence rows — birth_year at 0.62, gender at 0.55 — and the droid question, and it ends its turn asking you. That is the gate from slide 6, happening for real.</a:t>
-            </a:r>
-          </a:p>
-        </p:txBody>
-      </p:sp>
-      <p:sp>
-        <p:nvSpPr>
-          <p:cNvPr id="4" name="Slide Number Placeholder 3"/>
-          <p:cNvSpPr>
-            <a:spLocks noGrp="1"/>
-          </p:cNvSpPr>
-          <p:nvPr>
-            <p:ph type="sldNum" idx="5" sz="quarter"/>
-          </p:nvPr>
-        </p:nvSpPr>
-        <p:spPr/>
-      </p:sp>
-    </p:spTree>
-  </p:cSld>
-  <p:clrMapOvr>
-    <a:masterClrMapping/>
-  </p:clrMapOvr>
-</p:notes>
-</file>
-
-<file path=ppt/notesSlides/notesSlide15.xml><?xml version="1.0" encoding="utf-8"?>
-<p:notes xmlns:a="http://schemas.openxmlformats.org/drawingml/2006/main" xmlns:p="http://schemas.openxmlformats.org/presentationml/2006/main" xmlns:r="http://schemas.openxmlformats.org/officeDocument/2006/relationships">
-  <p:cSld>
-    <p:spTree>
-      <p:nvGrpSpPr>
-        <p:cNvPr id="1" name=""/>
-        <p:cNvGrpSpPr/>
-        <p:nvPr/>
-      </p:nvGrpSpPr>
-      <p:grpSpPr>
-        <a:xfrm>
-          <a:off x="0" y="0"/>
-          <a:ext cx="0" cy="0"/>
-          <a:chOff x="0" y="0"/>
-          <a:chExt cx="0" cy="0"/>
-        </a:xfrm>
-      </p:grpSpPr>
-      <p:sp>
-        <p:nvSpPr>
-          <p:cNvPr id="2" name="Slide Image Placeholder 1"/>
-          <p:cNvSpPr>
-            <a:spLocks noGrp="1"/>
-          </p:cNvSpPr>
-          <p:nvPr>
-            <p:ph type="sldImg" idx="2"/>
-          </p:nvPr>
-        </p:nvSpPr>
-        <p:spPr/>
-      </p:sp>
-      <p:sp>
-        <p:nvSpPr>
-          <p:cNvPr id="3" name="Notes Placeholder 2"/>
-          <p:cNvSpPr>
-            <a:spLocks noGrp="1"/>
-          </p:cNvSpPr>
-          <p:nvPr>
-            <p:ph type="body" idx="3" sz="quarter"/>
-          </p:nvPr>
-        </p:nvSpPr>
-        <p:spPr/>
-        <p:txBody>
-          <a:bodyPr/>
-          <a:lstStyle/>
-          <a:p>
-            <a:r>
-              <a:t>[12:30 — 2 min 30 s — DEMO STEP 3]</a:t>
-            </a:r>
-          </a:p>
-          <a:p>
-            <a:r>
-              <a:t>Read the orchestrator's question aloud, then ask the room: is a droid "Other" or "Unknown"? Take whatever they say and paste it back in plain words — the slide has a template, edit it to match their answer. The orchestrator turns your words into the approve command, records them in the mapping file with your name and a timestamp, and shows the check going green. Say: "the decision is now in the JSON, with who made it and when — not in this chat."</a:t>
-            </a:r>
-          </a:p>
-          <a:p/>
-          <a:p>
-            <a:r>
-              <a:t>Then it keeps going on its own. Generate: point at "regenerated 4, left untouched 5" — the generated folder was rewritten, the connector files were not, which is the ownership rule from slide 5. AI implement: read the token line — about three thousand tokens go to the model, sixteen thousand would have been the specs plus the client. Then it hands that brief to the connector agent, which fills the three TODO blocks and runs validate itself. This is the longest wait, one to three minutes. Do not type. Talk about slide 8 — what the model received and why so little — while it works.</a:t>
-            </a:r>
-          </a:p>
-          <a:p/>
-          <a:p>
-            <a:r>
-              <a:t>When it finishes, the orchestrator runs validate with --smoke: seven green gates, the last one a real call to the API. It asks the reviewer agent to check the diff against the mapping file, and reports: gate matrix, the two decisions recorded, files changed.</a:t>
-            </a:r>
-          </a:p>
-        </p:txBody>
-      </p:sp>
-      <p:sp>
-        <p:nvSpPr>
-          <p:cNvPr id="4" name="Slide Number Placeholder 3"/>
-          <p:cNvSpPr>
-            <a:spLocks noGrp="1"/>
-          </p:cNvSpPr>
-          <p:nvPr>
-            <p:ph type="sldNum" idx="5" sz="quarter"/>
-          </p:nvPr>
-        </p:nvSpPr>
-        <p:spPr/>
-      </p:sp>
-    </p:spTree>
-  </p:cSld>
-  <p:clrMapOvr>
-    <a:masterClrMapping/>
-  </p:clrMapOvr>
-</p:notes>
-</file>
-
-<file path=ppt/notesSlides/notesSlide16.xml><?xml version="1.0" encoding="utf-8"?>
-<p:notes xmlns:a="http://schemas.openxmlformats.org/drawingml/2006/main" xmlns:p="http://schemas.openxmlformats.org/presentationml/2006/main" xmlns:r="http://schemas.openxmlformats.org/officeDocument/2006/relationships">
-  <p:cSld>
-    <p:spTree>
-      <p:nvGrpSpPr>
-        <p:cNvPr id="1" name=""/>
-        <p:cNvGrpSpPr/>
-        <p:nvPr/>
-      </p:nvGrpSpPr>
-      <p:grpSpPr>
-        <a:xfrm>
-          <a:off x="0" y="0"/>
-          <a:ext cx="0" cy="0"/>
-          <a:chOff x="0" y="0"/>
-          <a:chExt cx="0" cy="0"/>
-        </a:xfrm>
-      </p:grpSpPr>
-      <p:sp>
-        <p:nvSpPr>
-          <p:cNvPr id="2" name="Slide Image Placeholder 1"/>
-          <p:cNvSpPr>
-            <a:spLocks noGrp="1"/>
-          </p:cNvSpPr>
-          <p:nvPr>
-            <p:ph type="sldImg" idx="2"/>
-          </p:nvPr>
-        </p:nvSpPr>
-        <p:spPr/>
-      </p:sp>
-      <p:sp>
-        <p:nvSpPr>
-          <p:cNvPr id="3" name="Notes Placeholder 2"/>
-          <p:cNvSpPr>
-            <a:spLocks noGrp="1"/>
-          </p:cNvSpPr>
-          <p:nvPr>
-            <p:ph type="body" idx="3" sz="quarter"/>
-          </p:nvPr>
-        </p:nvSpPr>
-        <p:spPr/>
-        <p:txBody>
-          <a:bodyPr/>
-          <a:lstStyle/>
-          <a:p>
-            <a:r>
-              <a:t>[15:00 — 1 min — DEMO STEP 4]</a:t>
-            </a:r>
-          </a:p>
-          <a:p>
-            <a:r>
-              <a:t>Now the trap. Paste the second prompt. The script it runs adds a "helpful" enrichment to GetCharacterAsync: fetch the film title so the UI can show it. It compiles. The tests pass. It calls a documented endpoint that works.</a:t>
-            </a:r>
-          </a:p>
-          <a:p/>
-          <a:p>
-            <a:r>
-              <a:t>The orchestrator runs validate and reports CONTRACT FAIL: GetFilmAsync is not an allowed operation for this connector; the allowed ones are the three in the manifest. And then — this is the point — it does not fix it. Its rules say a failing gate goes to a person. It lays out the options: remove the call, or add getFilm to the manifest and map it properly, which would mean a new mapping and a new approval. It asks you which. Say "remove it." It undoes the change and re-validates.</a:t>
-            </a:r>
-          </a:p>
-          <a:p/>
-          <a:p>
-            <a:r>
-              <a:t>Land the line: "That endpoint is documented and it works, and it was still blocked — because the manifest, not the code, decides what a connector may depend on. And the agent escalated instead of quietly patching." Then go to the takeaway.</a:t>
-            </a:r>
-          </a:p>
-          <a:p/>
-          <a:p>
-            <a:r>
-              <a:t>If anything stalled along the way: reset to the implemented checkpoint and ask the orchestrator to run validate --smoke and report. The end state is identical.</a:t>
-            </a:r>
-          </a:p>
-        </p:txBody>
-      </p:sp>
-      <p:sp>
-        <p:nvSpPr>
-          <p:cNvPr id="4" name="Slide Number Placeholder 3"/>
-          <p:cNvSpPr>
-            <a:spLocks noGrp="1"/>
-          </p:cNvSpPr>
-          <p:nvPr>
-            <p:ph type="sldNum" idx="5" sz="quarter"/>
-          </p:nvPr>
-        </p:nvSpPr>
-        <p:spPr/>
-      </p:sp>
-    </p:spTree>
-  </p:cSld>
-  <p:clrMapOvr>
-    <a:masterClrMapping/>
-  </p:clrMapOvr>
-</p:notes>
-</file>
-
-<file path=ppt/notesSlides/notesSlide17.xml><?xml version="1.0" encoding="utf-8"?>
-<p:notes xmlns:a="http://schemas.openxmlformats.org/drawingml/2006/main" xmlns:p="http://schemas.openxmlformats.org/presentationml/2006/main" xmlns:r="http://schemas.openxmlformats.org/officeDocument/2006/relationships">
-  <p:cSld>
-    <p:spTree>
-      <p:nvGrpSpPr>
-        <p:cNvPr id="1" name=""/>
-        <p:cNvGrpSpPr/>
-        <p:nvPr/>
-      </p:nvGrpSpPr>
-      <p:grpSpPr>
-        <a:xfrm>
-          <a:off x="0" y="0"/>
-          <a:ext cx="0" cy="0"/>
-          <a:chOff x="0" y="0"/>
-          <a:chExt cx="0" cy="0"/>
-        </a:xfrm>
-      </p:grpSpPr>
-      <p:sp>
-        <p:nvSpPr>
-          <p:cNvPr id="2" name="Slide Image Placeholder 1"/>
-          <p:cNvSpPr>
-            <a:spLocks noGrp="1"/>
-          </p:cNvSpPr>
-          <p:nvPr>
-            <p:ph type="sldImg" idx="2"/>
-          </p:nvPr>
-        </p:nvSpPr>
-        <p:spPr/>
-      </p:sp>
-      <p:sp>
-        <p:nvSpPr>
-          <p:cNvPr id="3" name="Notes Placeholder 2"/>
-          <p:cNvSpPr>
-            <a:spLocks noGrp="1"/>
-          </p:cNvSpPr>
-          <p:nvPr>
-            <p:ph type="body" idx="3" sz="quarter"/>
-          </p:nvPr>
-        </p:nvSpPr>
-        <p:spPr/>
-        <p:txBody>
-          <a:bodyPr/>
-          <a:lstStyle/>
-          <a:p>
-            <a:r>
-              <a:t>[16:00 — 1 min]</a:t>
-            </a:r>
-          </a:p>
-          <a:p>
-            <a:r>
-              <a:t>Three things to take away. The CLI builds the house, which is where consistency comes from. The AI furnishes the rooms inside guardrails, which is where the speed comes from. Gates and review keep us accountable, which is where the confidence comes from.</a:t>
-            </a:r>
-          </a:p>
-          <a:p/>
-          <a:p>
-            <a:r>
-              <a:t>None of this needed a new platform. The CLI is a small .NET tool, the agents are markdown files in the .github folder, and the gates are a script CI already runs. The investment is in the manifest, the mapping files and the policy — the parts that make the next connector cheaper than this one.</a:t>
-            </a:r>
-          </a:p>
-          <a:p/>
-          <a:p>
-            <a:r>
-              <a:t>Next step: point the CLI at a provider spec from a current project and run one connector through it. The repo has a README with everything we just did, so anyone here can replay it. Questions?</a:t>
+              <a:t>The repo is public — the link is on the slide. The README has a step-by-step walkthrough: one prompt to the orchestrator agent takes a connector from spec to seven green gates, stopping once to ask a person a business question, and a second prompt plants a failure so you can watch it get caught and escalated. Clone it, run it, and then point the CLI at a provider spec from a current project. Questions?</a:t>
             </a:r>
           </a:p>
         </p:txBody>
@@ -1294,7 +860,7 @@
           <a:p/>
           <a:p>
             <a:r>
-              <a:t>The important observation is that every one of these steps is repeated, by different people, with different judgement, on every connector. That is why the output is inconsistent even when the team is good. At the velocity we now work at, that is not acceptable. Keep the "same field, different meaning" problem in mind — we will hit a concrete one in the demo.</a:t>
+              <a:t>The important observation is that every one of these steps is repeated, by different people, with different judgement, on every connector. That is why the output is inconsistent even when the team is good. At the velocity we now work at, that is not acceptable. Keep the "same field, different meaning" problem in mind — there is a concrete one coming up in a few slides, with a field called gender.</a:t>
             </a:r>
           </a:p>
         </p:txBody>
@@ -1555,7 +1121,7 @@
           </a:p>
           <a:p>
             <a:r>
-              <a:t>This is the repository we are about to run. I'm using the Star Wars API for the demo — it's open, and it's the API every bootcamp uses, so it felt right.</a:t>
+              <a:t>This is the repository on GitHub. I built it against the Star Wars API — it's open, needs no authentication, and it's full of numbers stored as strings, years with letters in them, and URLs where you would expect ids, so mapping it is a real test. Also, it's the API every bootcamp uses, so it felt right.</a:t>
             </a:r>
           </a:p>
           <a:p/>
@@ -1660,7 +1226,7 @@
           </a:p>
           <a:p>
             <a:r>
-              <a:t>The developer journey is one chain of commands, and these are exactly the commands the orchestrator will run in a few minutes. I will not type any of them.</a:t>
+              <a:t>The developer journey is one chain of commands. In the repo, an orchestrator agent runs all of them from a single instruction — a person types nothing except one answer at the gate. The README shows exactly what that looks like.</a:t>
             </a:r>
           </a:p>
           <a:p/>
@@ -1858,7 +1424,7 @@
           <a:p/>
           <a:p>
             <a:r>
-              <a:t>The CLI assembles this package, not the engineer and not the model, so it is the same every time. In the demo it prints the numbers: about three thousand tokens go to the model; the full specs plus the generated client would be about sixteen thousand. Less context is faster, cheaper, and more consistent.</a:t>
+              <a:t>The CLI assembles this package, not the engineer and not the model, so it is the same every time. When you run it, the CLI prints the numbers: about three thousand tokens go to the model; the full specs plus the generated client would be about sixteen thousand. Less context is faster, cheaper, and more consistent.</a:t>
             </a:r>
           </a:p>
         </p:txBody>
@@ -1945,7 +1511,7 @@
           <a:p/>
           <a:p>
             <a:r>
-              <a:t>When a gate fails, the tooling does not try to fix it. The findings go back to a person who chooses what to do. We'll see that live — I've planted a failure.</a:t>
+              <a:t>When a gate fails, the tooling does not try to fix it. The findings go back to a person who chooses what to do. The repo includes a planted failure you can run yourself: a documented endpoint that works and still gets blocked, because the manifest — not the code — decides what a connector may call, and the agent escalates instead of quietly patching.</a:t>
             </a:r>
           </a:p>
         </p:txBody>
@@ -8385,5171 +7951,6 @@
     <p:bg>
       <p:bgPr>
         <a:solidFill>
-          <a:srgbClr val="F7F8FC"/>
-        </a:solidFill>
-        <a:effectLst/>
-      </p:bgPr>
-    </p:bg>
-    <p:spTree>
-      <p:nvGrpSpPr>
-        <p:cNvPr id="1" name=""/>
-        <p:cNvGrpSpPr/>
-        <p:nvPr/>
-      </p:nvGrpSpPr>
-      <p:grpSpPr/>
-      <p:sp>
-        <p:nvSpPr>
-          <p:cNvPr id="2" name="Rectangle 1"/>
-          <p:cNvSpPr/>
-          <p:nvPr/>
-        </p:nvSpPr>
-        <p:spPr>
-          <a:xfrm>
-            <a:off x="0" y="0"/>
-            <a:ext cx="12191695" cy="91440"/>
-          </a:xfrm>
-          <a:prstGeom prst="rect">
-            <a:avLst/>
-          </a:prstGeom>
-          <a:solidFill>
-            <a:srgbClr val="6D5DFB"/>
-          </a:solidFill>
-          <a:ln>
-            <a:solidFill>
-              <a:srgbClr val="6D5DFB"/>
-            </a:solidFill>
-          </a:ln>
-        </p:spPr>
-        <p:style>
-          <a:lnRef idx="1">
-            <a:schemeClr val="accent1"/>
-          </a:lnRef>
-          <a:fillRef idx="3">
-            <a:schemeClr val="accent1"/>
-          </a:fillRef>
-          <a:effectRef idx="2">
-            <a:schemeClr val="accent1"/>
-          </a:effectRef>
-          <a:fontRef idx="minor">
-            <a:schemeClr val="lt1"/>
-          </a:fontRef>
-        </p:style>
-        <p:txBody>
-          <a:bodyPr rtlCol="0" anchor="ctr"/>
-          <a:lstStyle/>
-          <a:p>
-            <a:pPr algn="ctr"/>
-          </a:p>
-        </p:txBody>
-      </p:sp>
-      <p:sp>
-        <p:nvSpPr>
-          <p:cNvPr id="3" name="TextBox 2"/>
-          <p:cNvSpPr txBox="1"/>
-          <p:nvPr/>
-        </p:nvSpPr>
-        <p:spPr>
-          <a:xfrm>
-            <a:off x="502920" y="6519672"/>
-            <a:ext cx="5486400" cy="146304"/>
-          </a:xfrm>
-          <a:prstGeom prst="rect">
-            <a:avLst/>
-          </a:prstGeom>
-          <a:noFill/>
-        </p:spPr>
-        <p:txBody>
-          <a:bodyPr wrap="square" lIns="0" rIns="0" tIns="0" bIns="0" anchor="ctr">
-            <a:spAutoFit/>
-          </a:bodyPr>
-          <a:lstStyle/>
-          <a:p>
-            <a:pPr algn="l"/>
-            <a:r>
-              <a:rPr sz="750" b="0">
-                <a:solidFill>
-                  <a:srgbClr val="7B8190"/>
-                </a:solidFill>
-                <a:latin typeface="Aptos"/>
-              </a:rPr>
-              <a:t>ALLATA  |  AI-ASSISTED INTEGRATION</a:t>
-            </a:r>
-          </a:p>
-        </p:txBody>
-      </p:sp>
-      <p:sp>
-        <p:nvSpPr>
-          <p:cNvPr id="4" name="TextBox 3"/>
-          <p:cNvSpPr txBox="1"/>
-          <p:nvPr/>
-        </p:nvSpPr>
-        <p:spPr>
-          <a:xfrm>
-            <a:off x="11384280" y="6519672"/>
-            <a:ext cx="320040" cy="146304"/>
-          </a:xfrm>
-          <a:prstGeom prst="rect">
-            <a:avLst/>
-          </a:prstGeom>
-          <a:noFill/>
-        </p:spPr>
-        <p:txBody>
-          <a:bodyPr wrap="square" lIns="0" rIns="0" tIns="0" bIns="0" anchor="ctr">
-            <a:spAutoFit/>
-          </a:bodyPr>
-          <a:lstStyle/>
-          <a:p>
-            <a:pPr algn="r"/>
-            <a:r>
-              <a:rPr sz="750" b="0">
-                <a:solidFill>
-                  <a:srgbClr val="9AA0AE"/>
-                </a:solidFill>
-                <a:latin typeface="Aptos"/>
-              </a:rPr>
-              <a:t>12</a:t>
-            </a:r>
-          </a:p>
-        </p:txBody>
-      </p:sp>
-      <p:sp>
-        <p:nvSpPr>
-          <p:cNvPr id="5" name="TextBox 4"/>
-          <p:cNvSpPr txBox="1"/>
-          <p:nvPr/>
-        </p:nvSpPr>
-        <p:spPr>
-          <a:xfrm>
-            <a:off x="566928" y="310896"/>
-            <a:ext cx="3657600" cy="219456"/>
-          </a:xfrm>
-          <a:prstGeom prst="rect">
-            <a:avLst/>
-          </a:prstGeom>
-          <a:noFill/>
-        </p:spPr>
-        <p:txBody>
-          <a:bodyPr wrap="square" lIns="0" rIns="0" tIns="0" bIns="0" anchor="ctr">
-            <a:spAutoFit/>
-          </a:bodyPr>
-          <a:lstStyle/>
-          <a:p>
-            <a:pPr algn="l"/>
-            <a:r>
-              <a:rPr sz="900" b="1">
-                <a:solidFill>
-                  <a:srgbClr val="6D5DFB"/>
-                </a:solidFill>
-                <a:latin typeface="Aptos"/>
-              </a:rPr>
-              <a:t>11 — LIVE DEMO</a:t>
-            </a:r>
-          </a:p>
-        </p:txBody>
-      </p:sp>
-      <p:sp>
-        <p:nvSpPr>
-          <p:cNvPr id="6" name="TextBox 5"/>
-          <p:cNvSpPr txBox="1"/>
-          <p:nvPr/>
-        </p:nvSpPr>
-        <p:spPr>
-          <a:xfrm>
-            <a:off x="566928" y="621792"/>
-            <a:ext cx="10972800" cy="521207"/>
-          </a:xfrm>
-          <a:prstGeom prst="rect">
-            <a:avLst/>
-          </a:prstGeom>
-          <a:noFill/>
-        </p:spPr>
-        <p:txBody>
-          <a:bodyPr wrap="square" lIns="0" rIns="0" tIns="0" bIns="0" anchor="ctr">
-            <a:spAutoFit/>
-          </a:bodyPr>
-          <a:lstStyle/>
-          <a:p>
-            <a:pPr algn="l"/>
-            <a:r>
-              <a:rPr sz="2800" b="1">
-                <a:solidFill>
-                  <a:srgbClr val="151A2D"/>
-                </a:solidFill>
-                <a:latin typeface="Aptos"/>
-              </a:rPr>
-              <a:t>One SWAPI connector, end to end</a:t>
-            </a:r>
-          </a:p>
-        </p:txBody>
-      </p:sp>
-      <p:sp>
-        <p:nvSpPr>
-          <p:cNvPr id="7" name="TextBox 6"/>
-          <p:cNvSpPr txBox="1"/>
-          <p:nvPr/>
-        </p:nvSpPr>
-        <p:spPr>
-          <a:xfrm>
-            <a:off x="566928" y="1179576"/>
-            <a:ext cx="10881360" cy="347472"/>
-          </a:xfrm>
-          <a:prstGeom prst="rect">
-            <a:avLst/>
-          </a:prstGeom>
-          <a:noFill/>
-        </p:spPr>
-        <p:txBody>
-          <a:bodyPr wrap="square" lIns="0" rIns="0" tIns="0" bIns="0" anchor="ctr">
-            <a:spAutoFit/>
-          </a:bodyPr>
-          <a:lstStyle/>
-          <a:p>
-            <a:pPr algn="l"/>
-            <a:r>
-              <a:rPr sz="1300" b="0">
-                <a:solidFill>
-                  <a:srgbClr val="626A7A"/>
-                </a:solidFill>
-                <a:latin typeface="Aptos"/>
-              </a:rPr>
-              <a:t>No auth, so it is good for a demo — and full of numbers stored as strings, years with letters, and URLs where you expect ids.</a:t>
-            </a:r>
-          </a:p>
-        </p:txBody>
-      </p:sp>
-      <p:sp>
-        <p:nvSpPr>
-          <p:cNvPr id="8" name="Rounded Rectangle 7"/>
-          <p:cNvSpPr/>
-          <p:nvPr/>
-        </p:nvSpPr>
-        <p:spPr>
-          <a:xfrm>
-            <a:off x="685800" y="1755648"/>
-            <a:ext cx="384048" cy="292608"/>
-          </a:xfrm>
-          <a:prstGeom prst="roundRect">
-            <a:avLst/>
-          </a:prstGeom>
-          <a:solidFill>
-            <a:srgbClr val="E6F7F1"/>
-          </a:solidFill>
-          <a:ln>
-            <a:solidFill>
-              <a:srgbClr val="E6F7F1"/>
-            </a:solidFill>
-          </a:ln>
-        </p:spPr>
-        <p:style>
-          <a:lnRef idx="1">
-            <a:schemeClr val="accent1"/>
-          </a:lnRef>
-          <a:fillRef idx="3">
-            <a:schemeClr val="accent1"/>
-          </a:fillRef>
-          <a:effectRef idx="2">
-            <a:schemeClr val="accent1"/>
-          </a:effectRef>
-          <a:fontRef idx="minor">
-            <a:schemeClr val="lt1"/>
-          </a:fontRef>
-        </p:style>
-        <p:txBody>
-          <a:bodyPr rtlCol="0" anchor="ctr"/>
-          <a:lstStyle/>
-          <a:p>
-            <a:pPr algn="ctr"/>
-          </a:p>
-        </p:txBody>
-      </p:sp>
-      <p:sp>
-        <p:nvSpPr>
-          <p:cNvPr id="9" name="TextBox 8"/>
-          <p:cNvSpPr txBox="1"/>
-          <p:nvPr/>
-        </p:nvSpPr>
-        <p:spPr>
-          <a:xfrm>
-            <a:off x="740664" y="1773936"/>
-            <a:ext cx="274320" cy="246888"/>
-          </a:xfrm>
-          <a:prstGeom prst="rect">
-            <a:avLst/>
-          </a:prstGeom>
-          <a:noFill/>
-        </p:spPr>
-        <p:txBody>
-          <a:bodyPr wrap="square" lIns="0" rIns="0" tIns="0" bIns="0" anchor="ctr">
-            <a:spAutoFit/>
-          </a:bodyPr>
-          <a:lstStyle/>
-          <a:p>
-            <a:pPr algn="ctr"/>
-            <a:r>
-              <a:rPr sz="900" b="1">
-                <a:solidFill>
-                  <a:srgbClr val="2DBE88"/>
-                </a:solidFill>
-                <a:latin typeface="Aptos"/>
-              </a:rPr>
-              <a:t>✓</a:t>
-            </a:r>
-          </a:p>
-        </p:txBody>
-      </p:sp>
-      <p:sp>
-        <p:nvSpPr>
-          <p:cNvPr id="10" name="TextBox 9"/>
-          <p:cNvSpPr txBox="1"/>
-          <p:nvPr/>
-        </p:nvSpPr>
-        <p:spPr>
-          <a:xfrm>
-            <a:off x="1207008" y="1746504"/>
-            <a:ext cx="3154680" cy="320040"/>
-          </a:xfrm>
-          <a:prstGeom prst="rect">
-            <a:avLst/>
-          </a:prstGeom>
-          <a:noFill/>
-        </p:spPr>
-        <p:txBody>
-          <a:bodyPr wrap="square" lIns="0" rIns="0" tIns="0" bIns="0" anchor="ctr">
-            <a:spAutoFit/>
-          </a:bodyPr>
-          <a:lstStyle/>
-          <a:p>
-            <a:pPr algn="l"/>
-            <a:r>
-              <a:rPr sz="1400" b="1">
-                <a:solidFill>
-                  <a:srgbClr val="151A2D"/>
-                </a:solidFill>
-                <a:latin typeface="Aptos"/>
-              </a:rPr>
-              <a:t>ONE PROMPT: @orchestrator drives</a:t>
-            </a:r>
-          </a:p>
-        </p:txBody>
-      </p:sp>
-      <p:sp>
-        <p:nvSpPr>
-          <p:cNvPr id="11" name="Rounded Rectangle 10"/>
-          <p:cNvSpPr/>
-          <p:nvPr/>
-        </p:nvSpPr>
-        <p:spPr>
-          <a:xfrm>
-            <a:off x="685800" y="2276856"/>
-            <a:ext cx="384048" cy="292608"/>
-          </a:xfrm>
-          <a:prstGeom prst="roundRect">
-            <a:avLst/>
-          </a:prstGeom>
-          <a:solidFill>
-            <a:srgbClr val="E6F7F1"/>
-          </a:solidFill>
-          <a:ln>
-            <a:solidFill>
-              <a:srgbClr val="E6F7F1"/>
-            </a:solidFill>
-          </a:ln>
-        </p:spPr>
-        <p:style>
-          <a:lnRef idx="1">
-            <a:schemeClr val="accent1"/>
-          </a:lnRef>
-          <a:fillRef idx="3">
-            <a:schemeClr val="accent1"/>
-          </a:fillRef>
-          <a:effectRef idx="2">
-            <a:schemeClr val="accent1"/>
-          </a:effectRef>
-          <a:fontRef idx="minor">
-            <a:schemeClr val="lt1"/>
-          </a:fontRef>
-        </p:style>
-        <p:txBody>
-          <a:bodyPr rtlCol="0" anchor="ctr"/>
-          <a:lstStyle/>
-          <a:p>
-            <a:pPr algn="ctr"/>
-          </a:p>
-        </p:txBody>
-      </p:sp>
-      <p:sp>
-        <p:nvSpPr>
-          <p:cNvPr id="12" name="TextBox 11"/>
-          <p:cNvSpPr txBox="1"/>
-          <p:nvPr/>
-        </p:nvSpPr>
-        <p:spPr>
-          <a:xfrm>
-            <a:off x="740664" y="2295144"/>
-            <a:ext cx="274320" cy="246888"/>
-          </a:xfrm>
-          <a:prstGeom prst="rect">
-            <a:avLst/>
-          </a:prstGeom>
-          <a:noFill/>
-        </p:spPr>
-        <p:txBody>
-          <a:bodyPr wrap="square" lIns="0" rIns="0" tIns="0" bIns="0" anchor="ctr">
-            <a:spAutoFit/>
-          </a:bodyPr>
-          <a:lstStyle/>
-          <a:p>
-            <a:pPr algn="ctr"/>
-            <a:r>
-              <a:rPr sz="900" b="1">
-                <a:solidFill>
-                  <a:srgbClr val="2DBE88"/>
-                </a:solidFill>
-                <a:latin typeface="Aptos"/>
-              </a:rPr>
-              <a:t>✓</a:t>
-            </a:r>
-          </a:p>
-        </p:txBody>
-      </p:sp>
-      <p:sp>
-        <p:nvSpPr>
-          <p:cNvPr id="13" name="TextBox 12"/>
-          <p:cNvSpPr txBox="1"/>
-          <p:nvPr/>
-        </p:nvSpPr>
-        <p:spPr>
-          <a:xfrm>
-            <a:off x="1207008" y="2267712"/>
-            <a:ext cx="3154680" cy="320040"/>
-          </a:xfrm>
-          <a:prstGeom prst="rect">
-            <a:avLst/>
-          </a:prstGeom>
-          <a:noFill/>
-        </p:spPr>
-        <p:txBody>
-          <a:bodyPr wrap="square" lIns="0" rIns="0" tIns="0" bIns="0" anchor="ctr">
-            <a:spAutoFit/>
-          </a:bodyPr>
-          <a:lstStyle/>
-          <a:p>
-            <a:pPr algn="l"/>
-            <a:r>
-              <a:rPr sz="1400" b="1">
-                <a:solidFill>
-                  <a:srgbClr val="151A2D"/>
-                </a:solidFill>
-                <a:latin typeface="Aptos"/>
-              </a:rPr>
-              <a:t>MAP: agent proposes, then it STOPS</a:t>
-            </a:r>
-          </a:p>
-        </p:txBody>
-      </p:sp>
-      <p:sp>
-        <p:nvSpPr>
-          <p:cNvPr id="14" name="Rounded Rectangle 13"/>
-          <p:cNvSpPr/>
-          <p:nvPr/>
-        </p:nvSpPr>
-        <p:spPr>
-          <a:xfrm>
-            <a:off x="685800" y="2798063"/>
-            <a:ext cx="384048" cy="292608"/>
-          </a:xfrm>
-          <a:prstGeom prst="roundRect">
-            <a:avLst/>
-          </a:prstGeom>
-          <a:solidFill>
-            <a:srgbClr val="E6F7F1"/>
-          </a:solidFill>
-          <a:ln>
-            <a:solidFill>
-              <a:srgbClr val="E6F7F1"/>
-            </a:solidFill>
-          </a:ln>
-        </p:spPr>
-        <p:style>
-          <a:lnRef idx="1">
-            <a:schemeClr val="accent1"/>
-          </a:lnRef>
-          <a:fillRef idx="3">
-            <a:schemeClr val="accent1"/>
-          </a:fillRef>
-          <a:effectRef idx="2">
-            <a:schemeClr val="accent1"/>
-          </a:effectRef>
-          <a:fontRef idx="minor">
-            <a:schemeClr val="lt1"/>
-          </a:fontRef>
-        </p:style>
-        <p:txBody>
-          <a:bodyPr rtlCol="0" anchor="ctr"/>
-          <a:lstStyle/>
-          <a:p>
-            <a:pPr algn="ctr"/>
-          </a:p>
-        </p:txBody>
-      </p:sp>
-      <p:sp>
-        <p:nvSpPr>
-          <p:cNvPr id="15" name="TextBox 14"/>
-          <p:cNvSpPr txBox="1"/>
-          <p:nvPr/>
-        </p:nvSpPr>
-        <p:spPr>
-          <a:xfrm>
-            <a:off x="740664" y="2816351"/>
-            <a:ext cx="274320" cy="246888"/>
-          </a:xfrm>
-          <a:prstGeom prst="rect">
-            <a:avLst/>
-          </a:prstGeom>
-          <a:noFill/>
-        </p:spPr>
-        <p:txBody>
-          <a:bodyPr wrap="square" lIns="0" rIns="0" tIns="0" bIns="0" anchor="ctr">
-            <a:spAutoFit/>
-          </a:bodyPr>
-          <a:lstStyle/>
-          <a:p>
-            <a:pPr algn="ctr"/>
-            <a:r>
-              <a:rPr sz="900" b="1">
-                <a:solidFill>
-                  <a:srgbClr val="2DBE88"/>
-                </a:solidFill>
-                <a:latin typeface="Aptos"/>
-              </a:rPr>
-              <a:t>✓</a:t>
-            </a:r>
-          </a:p>
-        </p:txBody>
-      </p:sp>
-      <p:sp>
-        <p:nvSpPr>
-          <p:cNvPr id="16" name="TextBox 15"/>
-          <p:cNvSpPr txBox="1"/>
-          <p:nvPr/>
-        </p:nvSpPr>
-        <p:spPr>
-          <a:xfrm>
-            <a:off x="1207008" y="2788920"/>
-            <a:ext cx="3154680" cy="320040"/>
-          </a:xfrm>
-          <a:prstGeom prst="rect">
-            <a:avLst/>
-          </a:prstGeom>
-          <a:noFill/>
-        </p:spPr>
-        <p:txBody>
-          <a:bodyPr wrap="square" lIns="0" rIns="0" tIns="0" bIns="0" anchor="ctr">
-            <a:spAutoFit/>
-          </a:bodyPr>
-          <a:lstStyle/>
-          <a:p>
-            <a:pPr algn="l"/>
-            <a:r>
-              <a:rPr sz="1400" b="1">
-                <a:solidFill>
-                  <a:srgbClr val="151A2D"/>
-                </a:solidFill>
-                <a:latin typeface="Aptos"/>
-              </a:rPr>
-              <a:t>GATE: the room decides, AI records it</a:t>
-            </a:r>
-          </a:p>
-        </p:txBody>
-      </p:sp>
-      <p:sp>
-        <p:nvSpPr>
-          <p:cNvPr id="17" name="Rounded Rectangle 16"/>
-          <p:cNvSpPr/>
-          <p:nvPr/>
-        </p:nvSpPr>
-        <p:spPr>
-          <a:xfrm>
-            <a:off x="685800" y="3319272"/>
-            <a:ext cx="384048" cy="292608"/>
-          </a:xfrm>
-          <a:prstGeom prst="roundRect">
-            <a:avLst/>
-          </a:prstGeom>
-          <a:solidFill>
-            <a:srgbClr val="E6F7F1"/>
-          </a:solidFill>
-          <a:ln>
-            <a:solidFill>
-              <a:srgbClr val="E6F7F1"/>
-            </a:solidFill>
-          </a:ln>
-        </p:spPr>
-        <p:style>
-          <a:lnRef idx="1">
-            <a:schemeClr val="accent1"/>
-          </a:lnRef>
-          <a:fillRef idx="3">
-            <a:schemeClr val="accent1"/>
-          </a:fillRef>
-          <a:effectRef idx="2">
-            <a:schemeClr val="accent1"/>
-          </a:effectRef>
-          <a:fontRef idx="minor">
-            <a:schemeClr val="lt1"/>
-          </a:fontRef>
-        </p:style>
-        <p:txBody>
-          <a:bodyPr rtlCol="0" anchor="ctr"/>
-          <a:lstStyle/>
-          <a:p>
-            <a:pPr algn="ctr"/>
-          </a:p>
-        </p:txBody>
-      </p:sp>
-      <p:sp>
-        <p:nvSpPr>
-          <p:cNvPr id="18" name="TextBox 17"/>
-          <p:cNvSpPr txBox="1"/>
-          <p:nvPr/>
-        </p:nvSpPr>
-        <p:spPr>
-          <a:xfrm>
-            <a:off x="740664" y="3337560"/>
-            <a:ext cx="274320" cy="246888"/>
-          </a:xfrm>
-          <a:prstGeom prst="rect">
-            <a:avLst/>
-          </a:prstGeom>
-          <a:noFill/>
-        </p:spPr>
-        <p:txBody>
-          <a:bodyPr wrap="square" lIns="0" rIns="0" tIns="0" bIns="0" anchor="ctr">
-            <a:spAutoFit/>
-          </a:bodyPr>
-          <a:lstStyle/>
-          <a:p>
-            <a:pPr algn="ctr"/>
-            <a:r>
-              <a:rPr sz="900" b="1">
-                <a:solidFill>
-                  <a:srgbClr val="2DBE88"/>
-                </a:solidFill>
-                <a:latin typeface="Aptos"/>
-              </a:rPr>
-              <a:t>✓</a:t>
-            </a:r>
-          </a:p>
-        </p:txBody>
-      </p:sp>
-      <p:sp>
-        <p:nvSpPr>
-          <p:cNvPr id="19" name="TextBox 18"/>
-          <p:cNvSpPr txBox="1"/>
-          <p:nvPr/>
-        </p:nvSpPr>
-        <p:spPr>
-          <a:xfrm>
-            <a:off x="1207008" y="3310128"/>
-            <a:ext cx="3154680" cy="320040"/>
-          </a:xfrm>
-          <a:prstGeom prst="rect">
-            <a:avLst/>
-          </a:prstGeom>
-          <a:noFill/>
-        </p:spPr>
-        <p:txBody>
-          <a:bodyPr wrap="square" lIns="0" rIns="0" tIns="0" bIns="0" anchor="ctr">
-            <a:spAutoFit/>
-          </a:bodyPr>
-          <a:lstStyle/>
-          <a:p>
-            <a:pPr algn="l"/>
-            <a:r>
-              <a:rPr sz="1400" b="1">
-                <a:solidFill>
-                  <a:srgbClr val="151A2D"/>
-                </a:solidFill>
-                <a:latin typeface="Aptos"/>
-              </a:rPr>
-              <a:t>IMPLEMENT + VALIDATE: agents, 7 gates</a:t>
-            </a:r>
-          </a:p>
-        </p:txBody>
-      </p:sp>
-      <p:sp>
-        <p:nvSpPr>
-          <p:cNvPr id="20" name="Rounded Rectangle 19"/>
-          <p:cNvSpPr/>
-          <p:nvPr/>
-        </p:nvSpPr>
-        <p:spPr>
-          <a:xfrm>
-            <a:off x="4572000" y="1664208"/>
-            <a:ext cx="6903720" cy="2788920"/>
-          </a:xfrm>
-          <a:prstGeom prst="roundRect">
-            <a:avLst/>
-          </a:prstGeom>
-          <a:solidFill>
-            <a:srgbClr val="FFFFFF"/>
-          </a:solidFill>
-          <a:ln>
-            <a:solidFill>
-              <a:srgbClr val="DDE1EA"/>
-            </a:solidFill>
-          </a:ln>
-        </p:spPr>
-        <p:style>
-          <a:lnRef idx="1">
-            <a:schemeClr val="accent1"/>
-          </a:lnRef>
-          <a:fillRef idx="3">
-            <a:schemeClr val="accent1"/>
-          </a:fillRef>
-          <a:effectRef idx="2">
-            <a:schemeClr val="accent1"/>
-          </a:effectRef>
-          <a:fontRef idx="minor">
-            <a:schemeClr val="lt1"/>
-          </a:fontRef>
-        </p:style>
-        <p:txBody>
-          <a:bodyPr rtlCol="0" anchor="ctr"/>
-          <a:lstStyle/>
-          <a:p>
-            <a:pPr algn="ctr"/>
-          </a:p>
-        </p:txBody>
-      </p:sp>
-      <p:sp>
-        <p:nvSpPr>
-          <p:cNvPr id="21" name="TextBox 20"/>
-          <p:cNvSpPr txBox="1"/>
-          <p:nvPr/>
-        </p:nvSpPr>
-        <p:spPr>
-          <a:xfrm>
-            <a:off x="4846320" y="1938528"/>
-            <a:ext cx="1234440" cy="228600"/>
-          </a:xfrm>
-          <a:prstGeom prst="rect">
-            <a:avLst/>
-          </a:prstGeom>
-          <a:noFill/>
-        </p:spPr>
-        <p:txBody>
-          <a:bodyPr wrap="square" lIns="0" rIns="0" tIns="0" bIns="0" anchor="ctr">
-            <a:spAutoFit/>
-          </a:bodyPr>
-          <a:lstStyle/>
-          <a:p>
-            <a:pPr algn="l"/>
-            <a:r>
-              <a:rPr sz="1000" b="1">
-                <a:solidFill>
-                  <a:srgbClr val="6D5DFB"/>
-                </a:solidFill>
-                <a:latin typeface="Aptos"/>
-              </a:rPr>
-              <a:t>WHAT TO WATCH</a:t>
-            </a:r>
-          </a:p>
-        </p:txBody>
-      </p:sp>
-      <p:sp>
-        <p:nvSpPr>
-          <p:cNvPr id="22" name="TextBox 21"/>
-          <p:cNvSpPr txBox="1"/>
-          <p:nvPr/>
-        </p:nvSpPr>
-        <p:spPr>
-          <a:xfrm>
-            <a:off x="4846320" y="2331720"/>
-            <a:ext cx="3154680" cy="246888"/>
-          </a:xfrm>
-          <a:prstGeom prst="rect">
-            <a:avLst/>
-          </a:prstGeom>
-          <a:noFill/>
-        </p:spPr>
-        <p:txBody>
-          <a:bodyPr wrap="square" lIns="0" rIns="0" tIns="0" bIns="0" anchor="ctr">
-            <a:spAutoFit/>
-          </a:bodyPr>
-          <a:lstStyle/>
-          <a:p>
-            <a:pPr algn="l"/>
-            <a:r>
-              <a:rPr sz="1200" b="1">
-                <a:solidFill>
-                  <a:srgbClr val="151A2D"/>
-                </a:solidFill>
-                <a:latin typeface="Aptos"/>
-              </a:rPr>
-              <a:t>Brief the model receives</a:t>
-            </a:r>
-          </a:p>
-        </p:txBody>
-      </p:sp>
-      <p:sp>
-        <p:nvSpPr>
-          <p:cNvPr id="23" name="TextBox 22"/>
-          <p:cNvSpPr txBox="1"/>
-          <p:nvPr/>
-        </p:nvSpPr>
-        <p:spPr>
-          <a:xfrm>
-            <a:off x="8595360" y="2331720"/>
-            <a:ext cx="2331720" cy="246888"/>
-          </a:xfrm>
-          <a:prstGeom prst="rect">
-            <a:avLst/>
-          </a:prstGeom>
-          <a:noFill/>
-        </p:spPr>
-        <p:txBody>
-          <a:bodyPr wrap="square" lIns="0" rIns="0" tIns="0" bIns="0" anchor="ctr">
-            <a:spAutoFit/>
-          </a:bodyPr>
-          <a:lstStyle/>
-          <a:p>
-            <a:pPr algn="r"/>
-            <a:r>
-              <a:rPr sz="1100" b="0">
-                <a:solidFill>
-                  <a:srgbClr val="626A7A"/>
-                </a:solidFill>
-                <a:latin typeface="Aptos"/>
-              </a:rPr>
-              <a:t>~3.5k vs ~16k tokens</a:t>
-            </a:r>
-          </a:p>
-        </p:txBody>
-      </p:sp>
-      <p:cxnSp>
-        <p:nvCxnSpPr>
-          <p:cNvPr id="24" name="Connector 23"/>
-          <p:cNvCxnSpPr/>
-          <p:nvPr/>
-        </p:nvCxnSpPr>
-        <p:spPr>
-          <a:xfrm>
-            <a:off x="4846320" y="2615184"/>
-            <a:ext cx="6172200" cy="0"/>
-          </a:xfrm>
-          <a:prstGeom prst="line">
-            <a:avLst/>
-          </a:prstGeom>
-          <a:ln w="7620">
-            <a:solidFill>
-              <a:srgbClr val="E8EAF0"/>
-            </a:solidFill>
-          </a:ln>
-        </p:spPr>
-        <p:style>
-          <a:lnRef idx="2">
-            <a:schemeClr val="accent1"/>
-          </a:lnRef>
-          <a:fillRef idx="0">
-            <a:schemeClr val="accent1"/>
-          </a:fillRef>
-          <a:effectRef idx="1">
-            <a:schemeClr val="accent1"/>
-          </a:effectRef>
-          <a:fontRef idx="minor">
-            <a:schemeClr val="tx1"/>
-          </a:fontRef>
-        </p:style>
-      </p:cxnSp>
-      <p:sp>
-        <p:nvSpPr>
-          <p:cNvPr id="25" name="TextBox 24"/>
-          <p:cNvSpPr txBox="1"/>
-          <p:nvPr/>
-        </p:nvSpPr>
-        <p:spPr>
-          <a:xfrm>
-            <a:off x="4846320" y="2715768"/>
-            <a:ext cx="3154680" cy="246888"/>
-          </a:xfrm>
-          <a:prstGeom prst="rect">
-            <a:avLst/>
-          </a:prstGeom>
-          <a:noFill/>
-        </p:spPr>
-        <p:txBody>
-          <a:bodyPr wrap="square" lIns="0" rIns="0" tIns="0" bIns="0" anchor="ctr">
-            <a:spAutoFit/>
-          </a:bodyPr>
-          <a:lstStyle/>
-          <a:p>
-            <a:pPr algn="l"/>
-            <a:r>
-              <a:rPr sz="1200" b="1">
-                <a:solidFill>
-                  <a:srgbClr val="151A2D"/>
-                </a:solidFill>
-                <a:latin typeface="Aptos"/>
-              </a:rPr>
-              <a:t>Human inputs in the whole run</a:t>
-            </a:r>
-          </a:p>
-        </p:txBody>
-      </p:sp>
-      <p:sp>
-        <p:nvSpPr>
-          <p:cNvPr id="26" name="TextBox 25"/>
-          <p:cNvSpPr txBox="1"/>
-          <p:nvPr/>
-        </p:nvSpPr>
-        <p:spPr>
-          <a:xfrm>
-            <a:off x="8595360" y="2715768"/>
-            <a:ext cx="2331720" cy="246888"/>
-          </a:xfrm>
-          <a:prstGeom prst="rect">
-            <a:avLst/>
-          </a:prstGeom>
-          <a:noFill/>
-        </p:spPr>
-        <p:txBody>
-          <a:bodyPr wrap="square" lIns="0" rIns="0" tIns="0" bIns="0" anchor="ctr">
-            <a:spAutoFit/>
-          </a:bodyPr>
-          <a:lstStyle/>
-          <a:p>
-            <a:pPr algn="r"/>
-            <a:r>
-              <a:rPr sz="1100" b="0">
-                <a:solidFill>
-                  <a:srgbClr val="626A7A"/>
-                </a:solidFill>
-                <a:latin typeface="Aptos"/>
-              </a:rPr>
-              <a:t>2 answers</a:t>
-            </a:r>
-          </a:p>
-        </p:txBody>
-      </p:sp>
-      <p:cxnSp>
-        <p:nvCxnSpPr>
-          <p:cNvPr id="27" name="Connector 26"/>
-          <p:cNvCxnSpPr/>
-          <p:nvPr/>
-        </p:nvCxnSpPr>
-        <p:spPr>
-          <a:xfrm>
-            <a:off x="4846320" y="2999232"/>
-            <a:ext cx="6172200" cy="0"/>
-          </a:xfrm>
-          <a:prstGeom prst="line">
-            <a:avLst/>
-          </a:prstGeom>
-          <a:ln w="7620">
-            <a:solidFill>
-              <a:srgbClr val="E8EAF0"/>
-            </a:solidFill>
-          </a:ln>
-        </p:spPr>
-        <p:style>
-          <a:lnRef idx="2">
-            <a:schemeClr val="accent1"/>
-          </a:lnRef>
-          <a:fillRef idx="0">
-            <a:schemeClr val="accent1"/>
-          </a:fillRef>
-          <a:effectRef idx="1">
-            <a:schemeClr val="accent1"/>
-          </a:effectRef>
-          <a:fontRef idx="minor">
-            <a:schemeClr val="tx1"/>
-          </a:fontRef>
-        </p:style>
-      </p:cxnSp>
-      <p:sp>
-        <p:nvSpPr>
-          <p:cNvPr id="28" name="TextBox 27"/>
-          <p:cNvSpPr txBox="1"/>
-          <p:nvPr/>
-        </p:nvSpPr>
-        <p:spPr>
-          <a:xfrm>
-            <a:off x="4846320" y="3099815"/>
-            <a:ext cx="3154680" cy="246888"/>
-          </a:xfrm>
-          <a:prstGeom prst="rect">
-            <a:avLst/>
-          </a:prstGeom>
-          <a:noFill/>
-        </p:spPr>
-        <p:txBody>
-          <a:bodyPr wrap="square" lIns="0" rIns="0" tIns="0" bIns="0" anchor="ctr">
-            <a:spAutoFit/>
-          </a:bodyPr>
-          <a:lstStyle/>
-          <a:p>
-            <a:pPr algn="l"/>
-            <a:r>
-              <a:rPr sz="1200" b="0">
-                <a:solidFill>
-                  <a:srgbClr val="151A2D"/>
-                </a:solidFill>
-                <a:latin typeface="Aptos"/>
-              </a:rPr>
-              <a:t>Regenerated vs untouched</a:t>
-            </a:r>
-          </a:p>
-        </p:txBody>
-      </p:sp>
-      <p:sp>
-        <p:nvSpPr>
-          <p:cNvPr id="29" name="TextBox 28"/>
-          <p:cNvSpPr txBox="1"/>
-          <p:nvPr/>
-        </p:nvSpPr>
-        <p:spPr>
-          <a:xfrm>
-            <a:off x="8595360" y="3099815"/>
-            <a:ext cx="2331720" cy="246888"/>
-          </a:xfrm>
-          <a:prstGeom prst="rect">
-            <a:avLst/>
-          </a:prstGeom>
-          <a:noFill/>
-        </p:spPr>
-        <p:txBody>
-          <a:bodyPr wrap="square" lIns="0" rIns="0" tIns="0" bIns="0" anchor="ctr">
-            <a:spAutoFit/>
-          </a:bodyPr>
-          <a:lstStyle/>
-          <a:p>
-            <a:pPr algn="r"/>
-            <a:r>
-              <a:rPr sz="1100" b="0">
-                <a:solidFill>
-                  <a:srgbClr val="626A7A"/>
-                </a:solidFill>
-                <a:latin typeface="Aptos"/>
-              </a:rPr>
-              <a:t>4 files vs 5</a:t>
-            </a:r>
-          </a:p>
-        </p:txBody>
-      </p:sp>
-      <p:cxnSp>
-        <p:nvCxnSpPr>
-          <p:cNvPr id="30" name="Connector 29"/>
-          <p:cNvCxnSpPr/>
-          <p:nvPr/>
-        </p:nvCxnSpPr>
-        <p:spPr>
-          <a:xfrm>
-            <a:off x="4846320" y="3383279"/>
-            <a:ext cx="6172200" cy="0"/>
-          </a:xfrm>
-          <a:prstGeom prst="line">
-            <a:avLst/>
-          </a:prstGeom>
-          <a:ln w="7620">
-            <a:solidFill>
-              <a:srgbClr val="E8EAF0"/>
-            </a:solidFill>
-          </a:ln>
-        </p:spPr>
-        <p:style>
-          <a:lnRef idx="2">
-            <a:schemeClr val="accent1"/>
-          </a:lnRef>
-          <a:fillRef idx="0">
-            <a:schemeClr val="accent1"/>
-          </a:fillRef>
-          <a:effectRef idx="1">
-            <a:schemeClr val="accent1"/>
-          </a:effectRef>
-          <a:fontRef idx="minor">
-            <a:schemeClr val="tx1"/>
-          </a:fontRef>
-        </p:style>
-      </p:cxnSp>
-      <p:sp>
-        <p:nvSpPr>
-          <p:cNvPr id="31" name="TextBox 30"/>
-          <p:cNvSpPr txBox="1"/>
-          <p:nvPr/>
-        </p:nvSpPr>
-        <p:spPr>
-          <a:xfrm>
-            <a:off x="4846320" y="3483863"/>
-            <a:ext cx="3154680" cy="246888"/>
-          </a:xfrm>
-          <a:prstGeom prst="rect">
-            <a:avLst/>
-          </a:prstGeom>
-          <a:noFill/>
-        </p:spPr>
-        <p:txBody>
-          <a:bodyPr wrap="square" lIns="0" rIns="0" tIns="0" bIns="0" anchor="ctr">
-            <a:spAutoFit/>
-          </a:bodyPr>
-          <a:lstStyle/>
-          <a:p>
-            <a:pPr algn="l"/>
-            <a:r>
-              <a:rPr sz="1200" b="0">
-                <a:solidFill>
-                  <a:srgbClr val="151A2D"/>
-                </a:solidFill>
-                <a:latin typeface="Aptos"/>
-              </a:rPr>
-              <a:t>Gates against the live API</a:t>
-            </a:r>
-          </a:p>
-        </p:txBody>
-      </p:sp>
-      <p:sp>
-        <p:nvSpPr>
-          <p:cNvPr id="32" name="TextBox 31"/>
-          <p:cNvSpPr txBox="1"/>
-          <p:nvPr/>
-        </p:nvSpPr>
-        <p:spPr>
-          <a:xfrm>
-            <a:off x="8595360" y="3483863"/>
-            <a:ext cx="2331720" cy="246888"/>
-          </a:xfrm>
-          <a:prstGeom prst="rect">
-            <a:avLst/>
-          </a:prstGeom>
-          <a:noFill/>
-        </p:spPr>
-        <p:txBody>
-          <a:bodyPr wrap="square" lIns="0" rIns="0" tIns="0" bIns="0" anchor="ctr">
-            <a:spAutoFit/>
-          </a:bodyPr>
-          <a:lstStyle/>
-          <a:p>
-            <a:pPr algn="r"/>
-            <a:r>
-              <a:rPr sz="1100" b="0">
-                <a:solidFill>
-                  <a:srgbClr val="626A7A"/>
-                </a:solidFill>
-                <a:latin typeface="Aptos"/>
-              </a:rPr>
-              <a:t>7 green</a:t>
-            </a:r>
-          </a:p>
-        </p:txBody>
-      </p:sp>
-      <p:cxnSp>
-        <p:nvCxnSpPr>
-          <p:cNvPr id="33" name="Connector 32"/>
-          <p:cNvCxnSpPr/>
-          <p:nvPr/>
-        </p:nvCxnSpPr>
-        <p:spPr>
-          <a:xfrm>
-            <a:off x="4846320" y="3767327"/>
-            <a:ext cx="6172200" cy="0"/>
-          </a:xfrm>
-          <a:prstGeom prst="line">
-            <a:avLst/>
-          </a:prstGeom>
-          <a:ln w="7620">
-            <a:solidFill>
-              <a:srgbClr val="E8EAF0"/>
-            </a:solidFill>
-          </a:ln>
-        </p:spPr>
-        <p:style>
-          <a:lnRef idx="2">
-            <a:schemeClr val="accent1"/>
-          </a:lnRef>
-          <a:fillRef idx="0">
-            <a:schemeClr val="accent1"/>
-          </a:fillRef>
-          <a:effectRef idx="1">
-            <a:schemeClr val="accent1"/>
-          </a:effectRef>
-          <a:fontRef idx="minor">
-            <a:schemeClr val="tx1"/>
-          </a:fontRef>
-        </p:style>
-      </p:cxnSp>
-      <p:sp>
-        <p:nvSpPr>
-          <p:cNvPr id="34" name="TextBox 33"/>
-          <p:cNvSpPr txBox="1"/>
-          <p:nvPr/>
-        </p:nvSpPr>
-        <p:spPr>
-          <a:xfrm>
-            <a:off x="4846320" y="3867911"/>
-            <a:ext cx="3154680" cy="246888"/>
-          </a:xfrm>
-          <a:prstGeom prst="rect">
-            <a:avLst/>
-          </a:prstGeom>
-          <a:noFill/>
-        </p:spPr>
-        <p:txBody>
-          <a:bodyPr wrap="square" lIns="0" rIns="0" tIns="0" bIns="0" anchor="ctr">
-            <a:spAutoFit/>
-          </a:bodyPr>
-          <a:lstStyle/>
-          <a:p>
-            <a:pPr algn="l"/>
-            <a:r>
-              <a:rPr sz="1200" b="0">
-                <a:solidFill>
-                  <a:srgbClr val="151A2D"/>
-                </a:solidFill>
-                <a:latin typeface="Aptos"/>
-              </a:rPr>
-              <a:t>Undocumented endpoint (trap)</a:t>
-            </a:r>
-          </a:p>
-        </p:txBody>
-      </p:sp>
-      <p:sp>
-        <p:nvSpPr>
-          <p:cNvPr id="35" name="TextBox 34"/>
-          <p:cNvSpPr txBox="1"/>
-          <p:nvPr/>
-        </p:nvSpPr>
-        <p:spPr>
-          <a:xfrm>
-            <a:off x="8595360" y="3867911"/>
-            <a:ext cx="2331720" cy="246888"/>
-          </a:xfrm>
-          <a:prstGeom prst="rect">
-            <a:avLst/>
-          </a:prstGeom>
-          <a:noFill/>
-        </p:spPr>
-        <p:txBody>
-          <a:bodyPr wrap="square" lIns="0" rIns="0" tIns="0" bIns="0" anchor="ctr">
-            <a:spAutoFit/>
-          </a:bodyPr>
-          <a:lstStyle/>
-          <a:p>
-            <a:pPr algn="r"/>
-            <a:r>
-              <a:rPr sz="1100" b="0">
-                <a:solidFill>
-                  <a:srgbClr val="626A7A"/>
-                </a:solidFill>
-                <a:latin typeface="Aptos"/>
-              </a:rPr>
-              <a:t>blocked, escalated, not fixed</a:t>
-            </a:r>
-          </a:p>
-        </p:txBody>
-      </p:sp>
-      <p:cxnSp>
-        <p:nvCxnSpPr>
-          <p:cNvPr id="36" name="Connector 35"/>
-          <p:cNvCxnSpPr/>
-          <p:nvPr/>
-        </p:nvCxnSpPr>
-        <p:spPr>
-          <a:xfrm>
-            <a:off x="4846320" y="4151375"/>
-            <a:ext cx="6172200" cy="0"/>
-          </a:xfrm>
-          <a:prstGeom prst="line">
-            <a:avLst/>
-          </a:prstGeom>
-          <a:ln w="7620">
-            <a:solidFill>
-              <a:srgbClr val="E8EAF0"/>
-            </a:solidFill>
-          </a:ln>
-        </p:spPr>
-        <p:style>
-          <a:lnRef idx="2">
-            <a:schemeClr val="accent1"/>
-          </a:lnRef>
-          <a:fillRef idx="0">
-            <a:schemeClr val="accent1"/>
-          </a:fillRef>
-          <a:effectRef idx="1">
-            <a:schemeClr val="accent1"/>
-          </a:effectRef>
-          <a:fontRef idx="minor">
-            <a:schemeClr val="tx1"/>
-          </a:fontRef>
-        </p:style>
-      </p:cxnSp>
-      <p:sp>
-        <p:nvSpPr>
-          <p:cNvPr id="37" name="Rounded Rectangle 36"/>
-          <p:cNvSpPr/>
-          <p:nvPr/>
-        </p:nvSpPr>
-        <p:spPr>
-          <a:xfrm>
-            <a:off x="685800" y="4800600"/>
-            <a:ext cx="10789920" cy="868680"/>
-          </a:xfrm>
-          <a:prstGeom prst="roundRect">
-            <a:avLst/>
-          </a:prstGeom>
-          <a:solidFill>
-            <a:srgbClr val="101426"/>
-          </a:solidFill>
-          <a:ln>
-            <a:solidFill>
-              <a:srgbClr val="101426"/>
-            </a:solidFill>
-          </a:ln>
-        </p:spPr>
-        <p:style>
-          <a:lnRef idx="1">
-            <a:schemeClr val="accent1"/>
-          </a:lnRef>
-          <a:fillRef idx="3">
-            <a:schemeClr val="accent1"/>
-          </a:fillRef>
-          <a:effectRef idx="2">
-            <a:schemeClr val="accent1"/>
-          </a:effectRef>
-          <a:fontRef idx="minor">
-            <a:schemeClr val="lt1"/>
-          </a:fontRef>
-        </p:style>
-        <p:txBody>
-          <a:bodyPr rtlCol="0" anchor="ctr"/>
-          <a:lstStyle/>
-          <a:p>
-            <a:pPr algn="ctr"/>
-          </a:p>
-        </p:txBody>
-      </p:sp>
-      <p:sp>
-        <p:nvSpPr>
-          <p:cNvPr id="38" name="TextBox 37"/>
-          <p:cNvSpPr txBox="1"/>
-          <p:nvPr/>
-        </p:nvSpPr>
-        <p:spPr>
-          <a:xfrm>
-            <a:off x="941832" y="5074920"/>
-            <a:ext cx="1508760" cy="228600"/>
-          </a:xfrm>
-          <a:prstGeom prst="rect">
-            <a:avLst/>
-          </a:prstGeom>
-          <a:noFill/>
-        </p:spPr>
-        <p:txBody>
-          <a:bodyPr wrap="square" lIns="0" rIns="0" tIns="0" bIns="0" anchor="ctr">
-            <a:spAutoFit/>
-          </a:bodyPr>
-          <a:lstStyle/>
-          <a:p>
-            <a:pPr algn="l"/>
-            <a:r>
-              <a:rPr sz="1000" b="1">
-                <a:solidFill>
-                  <a:srgbClr val="2CCCE4"/>
-                </a:solidFill>
-                <a:latin typeface="Aptos"/>
-              </a:rPr>
-              <a:t>TAKE-HOME</a:t>
-            </a:r>
-          </a:p>
-        </p:txBody>
-      </p:sp>
-      <p:sp>
-        <p:nvSpPr>
-          <p:cNvPr id="39" name="TextBox 38"/>
-          <p:cNvSpPr txBox="1"/>
-          <p:nvPr/>
-        </p:nvSpPr>
-        <p:spPr>
-          <a:xfrm>
-            <a:off x="2560320" y="4946904"/>
-            <a:ext cx="8412480" cy="420624"/>
-          </a:xfrm>
-          <a:prstGeom prst="rect">
-            <a:avLst/>
-          </a:prstGeom>
-          <a:noFill/>
-        </p:spPr>
-        <p:txBody>
-          <a:bodyPr wrap="square" lIns="0" rIns="0" tIns="0" bIns="0" anchor="ctr">
-            <a:spAutoFit/>
-          </a:bodyPr>
-          <a:lstStyle/>
-          <a:p>
-            <a:pPr algn="l"/>
-            <a:r>
-              <a:rPr sz="1700" b="1">
-                <a:solidFill>
-                  <a:srgbClr val="FFFFFF"/>
-                </a:solidFill>
-                <a:latin typeface="Aptos"/>
-              </a:rPr>
-              <a:t>Same loop we already run with our Copilot agents: codegen CLI, bounded agents, diff-scoped review, no auto-fix.</a:t>
-            </a:r>
-          </a:p>
-        </p:txBody>
-      </p:sp>
-      <p:sp>
-        <p:nvSpPr>
-          <p:cNvPr id="40" name="TextBox 39"/>
-          <p:cNvSpPr txBox="1"/>
-          <p:nvPr/>
-        </p:nvSpPr>
-        <p:spPr>
-          <a:xfrm>
-            <a:off x="685800" y="5925312"/>
-            <a:ext cx="10789920" cy="320040"/>
-          </a:xfrm>
-          <a:prstGeom prst="rect">
-            <a:avLst/>
-          </a:prstGeom>
-          <a:noFill/>
-        </p:spPr>
-        <p:txBody>
-          <a:bodyPr wrap="square" lIns="0" rIns="0" tIns="0" bIns="0" anchor="ctr">
-            <a:spAutoFit/>
-          </a:bodyPr>
-          <a:lstStyle/>
-          <a:p>
-            <a:pPr algn="ctr"/>
-            <a:r>
-              <a:rPr sz="1200" b="0">
-                <a:solidFill>
-                  <a:srgbClr val="626A7A"/>
-                </a:solidFill>
-                <a:latin typeface="Aptos"/>
-              </a:rPr>
-              <a:t>demo/reset.ps1 -To demo  →  “@orchestrator Run the integration factory for connector swapi, operation getCharacter”  →  the trap</a:t>
-            </a:r>
-          </a:p>
-        </p:txBody>
-      </p:sp>
-    </p:spTree>
-  </p:cSld>
-  <p:clrMapOvr>
-    <a:masterClrMapping/>
-  </p:clrMapOvr>
-</p:sld>
-</file>
-
-<file path=ppt/slides/slide13.xml><?xml version="1.0" encoding="utf-8"?>
-<p:sld xmlns:a="http://schemas.openxmlformats.org/drawingml/2006/main" xmlns:p="http://schemas.openxmlformats.org/presentationml/2006/main" xmlns:r="http://schemas.openxmlformats.org/officeDocument/2006/relationships">
-  <p:cSld>
-    <p:bg>
-      <p:bgPr>
-        <a:solidFill>
-          <a:srgbClr val="F7F8FC"/>
-        </a:solidFill>
-        <a:effectLst/>
-      </p:bgPr>
-    </p:bg>
-    <p:spTree>
-      <p:nvGrpSpPr>
-        <p:cNvPr id="1" name=""/>
-        <p:cNvGrpSpPr/>
-        <p:nvPr/>
-      </p:nvGrpSpPr>
-      <p:grpSpPr/>
-      <p:sp>
-        <p:nvSpPr>
-          <p:cNvPr id="2" name="Rectangle 1"/>
-          <p:cNvSpPr/>
-          <p:nvPr/>
-        </p:nvSpPr>
-        <p:spPr>
-          <a:xfrm>
-            <a:off x="0" y="0"/>
-            <a:ext cx="12191695" cy="91440"/>
-          </a:xfrm>
-          <a:prstGeom prst="rect">
-            <a:avLst/>
-          </a:prstGeom>
-          <a:solidFill>
-            <a:srgbClr val="6D5DFB"/>
-          </a:solidFill>
-          <a:ln>
-            <a:solidFill>
-              <a:srgbClr val="6D5DFB"/>
-            </a:solidFill>
-          </a:ln>
-        </p:spPr>
-        <p:style>
-          <a:lnRef idx="1">
-            <a:schemeClr val="accent1"/>
-          </a:lnRef>
-          <a:fillRef idx="3">
-            <a:schemeClr val="accent1"/>
-          </a:fillRef>
-          <a:effectRef idx="2">
-            <a:schemeClr val="accent1"/>
-          </a:effectRef>
-          <a:fontRef idx="minor">
-            <a:schemeClr val="lt1"/>
-          </a:fontRef>
-        </p:style>
-        <p:txBody>
-          <a:bodyPr rtlCol="0" anchor="ctr"/>
-          <a:lstStyle/>
-          <a:p>
-            <a:pPr algn="ctr"/>
-          </a:p>
-        </p:txBody>
-      </p:sp>
-      <p:sp>
-        <p:nvSpPr>
-          <p:cNvPr id="3" name="TextBox 2"/>
-          <p:cNvSpPr txBox="1"/>
-          <p:nvPr/>
-        </p:nvSpPr>
-        <p:spPr>
-          <a:xfrm>
-            <a:off x="502920" y="6519672"/>
-            <a:ext cx="5486400" cy="146304"/>
-          </a:xfrm>
-          <a:prstGeom prst="rect">
-            <a:avLst/>
-          </a:prstGeom>
-          <a:noFill/>
-        </p:spPr>
-        <p:txBody>
-          <a:bodyPr wrap="square" lIns="0" rIns="0" tIns="0" bIns="0" anchor="ctr">
-            <a:spAutoFit/>
-          </a:bodyPr>
-          <a:lstStyle/>
-          <a:p>
-            <a:pPr algn="l"/>
-            <a:r>
-              <a:rPr sz="750" b="0">
-                <a:solidFill>
-                  <a:srgbClr val="7B8190"/>
-                </a:solidFill>
-                <a:latin typeface="Aptos"/>
-              </a:rPr>
-              <a:t>ALLATA  |  AI-ASSISTED INTEGRATION</a:t>
-            </a:r>
-          </a:p>
-        </p:txBody>
-      </p:sp>
-      <p:sp>
-        <p:nvSpPr>
-          <p:cNvPr id="4" name="TextBox 3"/>
-          <p:cNvSpPr txBox="1"/>
-          <p:nvPr/>
-        </p:nvSpPr>
-        <p:spPr>
-          <a:xfrm>
-            <a:off x="11384280" y="6519672"/>
-            <a:ext cx="320040" cy="146304"/>
-          </a:xfrm>
-          <a:prstGeom prst="rect">
-            <a:avLst/>
-          </a:prstGeom>
-          <a:noFill/>
-        </p:spPr>
-        <p:txBody>
-          <a:bodyPr wrap="square" lIns="0" rIns="0" tIns="0" bIns="0" anchor="ctr">
-            <a:spAutoFit/>
-          </a:bodyPr>
-          <a:lstStyle/>
-          <a:p>
-            <a:pPr algn="r"/>
-            <a:r>
-              <a:rPr sz="750" b="0">
-                <a:solidFill>
-                  <a:srgbClr val="9AA0AE"/>
-                </a:solidFill>
-                <a:latin typeface="Aptos"/>
-              </a:rPr>
-              <a:t>13</a:t>
-            </a:r>
-          </a:p>
-        </p:txBody>
-      </p:sp>
-      <p:sp>
-        <p:nvSpPr>
-          <p:cNvPr id="5" name="TextBox 4"/>
-          <p:cNvSpPr txBox="1"/>
-          <p:nvPr/>
-        </p:nvSpPr>
-        <p:spPr>
-          <a:xfrm>
-            <a:off x="566928" y="310896"/>
-            <a:ext cx="3657600" cy="219456"/>
-          </a:xfrm>
-          <a:prstGeom prst="rect">
-            <a:avLst/>
-          </a:prstGeom>
-          <a:noFill/>
-        </p:spPr>
-        <p:txBody>
-          <a:bodyPr wrap="square" lIns="0" rIns="0" tIns="0" bIns="0" anchor="ctr">
-            <a:spAutoFit/>
-          </a:bodyPr>
-          <a:lstStyle/>
-          <a:p>
-            <a:pPr algn="l"/>
-            <a:r>
-              <a:rPr sz="900" b="1">
-                <a:solidFill>
-                  <a:srgbClr val="6D5DFB"/>
-                </a:solidFill>
-                <a:latin typeface="Aptos"/>
-              </a:rPr>
-              <a:t>12 — DEMO STEP 1</a:t>
-            </a:r>
-          </a:p>
-        </p:txBody>
-      </p:sp>
-      <p:sp>
-        <p:nvSpPr>
-          <p:cNvPr id="6" name="TextBox 5"/>
-          <p:cNvSpPr txBox="1"/>
-          <p:nvPr/>
-        </p:nvSpPr>
-        <p:spPr>
-          <a:xfrm>
-            <a:off x="566928" y="621792"/>
-            <a:ext cx="10972800" cy="521207"/>
-          </a:xfrm>
-          <a:prstGeom prst="rect">
-            <a:avLst/>
-          </a:prstGeom>
-          <a:noFill/>
-        </p:spPr>
-        <p:txBody>
-          <a:bodyPr wrap="square" lIns="0" rIns="0" tIns="0" bIns="0" anchor="ctr">
-            <a:spAutoFit/>
-          </a:bodyPr>
-          <a:lstStyle/>
-          <a:p>
-            <a:pPr algn="l"/>
-            <a:r>
-              <a:rPr sz="2800" b="1">
-                <a:solidFill>
-                  <a:srgbClr val="151A2D"/>
-                </a:solidFill>
-                <a:latin typeface="Aptos"/>
-              </a:rPr>
-              <a:t>Before the room arrives</a:t>
-            </a:r>
-          </a:p>
-        </p:txBody>
-      </p:sp>
-      <p:sp>
-        <p:nvSpPr>
-          <p:cNvPr id="7" name="TextBox 6"/>
-          <p:cNvSpPr txBox="1"/>
-          <p:nvPr/>
-        </p:nvSpPr>
-        <p:spPr>
-          <a:xfrm>
-            <a:off x="566928" y="1179576"/>
-            <a:ext cx="10881360" cy="347472"/>
-          </a:xfrm>
-          <a:prstGeom prst="rect">
-            <a:avLst/>
-          </a:prstGeom>
-          <a:noFill/>
-        </p:spPr>
-        <p:txBody>
-          <a:bodyPr wrap="square" lIns="0" rIns="0" tIns="0" bIns="0" anchor="ctr">
-            <a:spAutoFit/>
-          </a:bodyPr>
-          <a:lstStyle/>
-          <a:p>
-            <a:pPr algn="l"/>
-            <a:r>
-              <a:rPr sz="1300" b="0">
-                <a:solidFill>
-                  <a:srgbClr val="626A7A"/>
-                </a:solidFill>
-                <a:latin typeface="Aptos"/>
-              </a:rPr>
-              <a:t>Put the repo at the demo checkpoint. Everything below is copy-paste.</a:t>
-            </a:r>
-          </a:p>
-        </p:txBody>
-      </p:sp>
-      <p:sp>
-        <p:nvSpPr>
-          <p:cNvPr id="8" name="Rounded Rectangle 7"/>
-          <p:cNvSpPr/>
-          <p:nvPr/>
-        </p:nvSpPr>
-        <p:spPr>
-          <a:xfrm>
-            <a:off x="621792" y="1664208"/>
-            <a:ext cx="6720840" cy="4343400"/>
-          </a:xfrm>
-          <a:prstGeom prst="roundRect">
-            <a:avLst/>
-          </a:prstGeom>
-          <a:solidFill>
-            <a:srgbClr val="101426"/>
-          </a:solidFill>
-          <a:ln>
-            <a:solidFill>
-              <a:srgbClr val="101426"/>
-            </a:solidFill>
-          </a:ln>
-        </p:spPr>
-        <p:style>
-          <a:lnRef idx="1">
-            <a:schemeClr val="accent1"/>
-          </a:lnRef>
-          <a:fillRef idx="3">
-            <a:schemeClr val="accent1"/>
-          </a:fillRef>
-          <a:effectRef idx="2">
-            <a:schemeClr val="accent1"/>
-          </a:effectRef>
-          <a:fontRef idx="minor">
-            <a:schemeClr val="lt1"/>
-          </a:fontRef>
-        </p:style>
-        <p:txBody>
-          <a:bodyPr rtlCol="0" anchor="ctr"/>
-          <a:lstStyle/>
-          <a:p>
-            <a:pPr algn="ctr"/>
-          </a:p>
-        </p:txBody>
-      </p:sp>
-      <p:sp>
-        <p:nvSpPr>
-          <p:cNvPr id="9" name="TextBox 8"/>
-          <p:cNvSpPr txBox="1"/>
-          <p:nvPr/>
-        </p:nvSpPr>
-        <p:spPr>
-          <a:xfrm>
-            <a:off x="914400" y="1901952"/>
-            <a:ext cx="6126480" cy="3794760"/>
-          </a:xfrm>
-          <a:prstGeom prst="rect">
-            <a:avLst/>
-          </a:prstGeom>
-          <a:noFill/>
-        </p:spPr>
-        <p:txBody>
-          <a:bodyPr wrap="square" lIns="0" rIns="0" tIns="0" bIns="0" anchor="t">
-            <a:spAutoFit/>
-          </a:bodyPr>
-          <a:lstStyle/>
-          <a:p>
-            <a:pPr algn="l"/>
-            <a:r>
-              <a:rPr sz="1150" b="0">
-                <a:solidFill>
-                  <a:srgbClr val="D9E0F4"/>
-                </a:solidFill>
-                <a:latin typeface="Courier New"/>
-              </a:rPr>
-              <a:t>PS&gt; .\demo\reset.ps1 -To demo</a:t>
-            </a:r>
-            <a:br/>
-            <a:r>
-              <a:rPr sz="1150" b="0">
-                <a:solidFill>
-                  <a:srgbClr val="D9E0F4"/>
-                </a:solidFill>
-                <a:latin typeface="Courier New"/>
-              </a:rPr>
-              <a:t/>
-            </a:r>
-            <a:br/>
-            <a:r>
-              <a:rPr sz="1150" b="0">
-                <a:solidFill>
-                  <a:srgbClr val="D9E0F4"/>
-                </a:solidFill>
-                <a:latin typeface="Courier New"/>
-              </a:rPr>
-              <a:t># searchCharacters + getPlanet: done and green</a:t>
-            </a:r>
-            <a:br/>
-            <a:r>
-              <a:rPr sz="1150" b="0">
-                <a:solidFill>
-                  <a:srgbClr val="D9E0F4"/>
-                </a:solidFill>
-                <a:latin typeface="Courier New"/>
-              </a:rPr>
-              <a:t># getCharacter: no mapping, TODO(ai) blocks</a:t>
-            </a:r>
-            <a:br/>
-            <a:r>
-              <a:rPr sz="1150" b="0">
-                <a:solidFill>
-                  <a:srgbClr val="D9E0F4"/>
-                </a:solidFill>
-                <a:latin typeface="Courier New"/>
-              </a:rPr>
-              <a:t/>
-            </a:r>
-            <a:br/>
-            <a:r>
-              <a:rPr sz="1150" b="0">
-                <a:solidFill>
-                  <a:srgbClr val="D9E0F4"/>
-                </a:solidFill>
-                <a:latin typeface="Courier New"/>
-              </a:rPr>
-              <a:t>Open before starting:</a:t>
-            </a:r>
-            <a:br/>
-            <a:r>
-              <a:rPr sz="1150" b="0">
-                <a:solidFill>
-                  <a:srgbClr val="D9E0F4"/>
-                </a:solidFill>
-                <a:latin typeface="Courier New"/>
-              </a:rPr>
-              <a:t>  VS Code, Copilot agent mode, terminal visible</a:t>
-            </a:r>
-            <a:br/>
-            <a:r>
-              <a:rPr sz="1150" b="0">
-                <a:solidFill>
-                  <a:srgbClr val="D9E0F4"/>
-                </a:solidFill>
-                <a:latin typeface="Courier New"/>
-              </a:rPr>
-              <a:t>  https://swapi.dev/api/people/2/   (C-3PO)</a:t>
-            </a:r>
-            <a:br/>
-            <a:r>
-              <a:rPr sz="1150" b="0">
-                <a:solidFill>
-                  <a:srgbClr val="D9E0F4"/>
-                </a:solidFill>
-                <a:latin typeface="Courier New"/>
-              </a:rPr>
-              <a:t/>
-            </a:r>
-            <a:br/>
-            <a:r>
-              <a:rPr sz="1150" b="0">
-                <a:solidFill>
-                  <a:srgbClr val="D9E0F4"/>
-                </a:solidFill>
-                <a:latin typeface="Courier New"/>
-              </a:rPr>
-              <a:t>Optional check (do NOT show):</a:t>
-            </a:r>
-            <a:br/>
-            <a:r>
-              <a:rPr sz="1150" b="0">
-                <a:solidFill>
-                  <a:srgbClr val="D9E0F4"/>
-                </a:solidFill>
-                <a:latin typeface="Courier New"/>
-              </a:rPr>
-              <a:t>PS&gt; dotnet run --project src/Factory.Cli -- map swapi --check</a:t>
-            </a:r>
-            <a:br/>
-            <a:r>
-              <a:rPr sz="1150" b="0">
-                <a:solidFill>
-                  <a:srgbClr val="D9E0F4"/>
-                </a:solidFill>
-                <a:latin typeface="Courier New"/>
-              </a:rPr>
-              <a:t/>
-            </a:r>
-            <a:br/>
-            <a:r>
-              <a:rPr sz="1150" b="0">
-                <a:solidFill>
-                  <a:srgbClr val="D9E0F4"/>
-                </a:solidFill>
-                <a:latin typeface="Courier New"/>
-              </a:rPr>
-              <a:t/>
-            </a:r>
-            <a:br/>
-            <a:r>
-              <a:rPr sz="1150" b="0">
-                <a:solidFill>
-                  <a:srgbClr val="D9E0F4"/>
-                </a:solidFill>
-                <a:latin typeface="Courier New"/>
-              </a:rPr>
-              <a:t/>
-            </a:r>
-            <a:br/>
-            <a:r>
-              <a:rPr sz="1150" b="0">
-                <a:solidFill>
-                  <a:srgbClr val="D9E0F4"/>
-                </a:solidFill>
-                <a:latin typeface="Courier New"/>
-              </a:rPr>
-              <a:t/>
-            </a:r>
-          </a:p>
-        </p:txBody>
-      </p:sp>
-      <p:sp>
-        <p:nvSpPr>
-          <p:cNvPr id="10" name="Rounded Rectangle 9"/>
-          <p:cNvSpPr/>
-          <p:nvPr/>
-        </p:nvSpPr>
-        <p:spPr>
-          <a:xfrm>
-            <a:off x="7726679" y="1755648"/>
-            <a:ext cx="1234440" cy="292608"/>
-          </a:xfrm>
-          <a:prstGeom prst="roundRect">
-            <a:avLst/>
-          </a:prstGeom>
-          <a:solidFill>
-            <a:srgbClr val="EEEAFE"/>
-          </a:solidFill>
-          <a:ln>
-            <a:solidFill>
-              <a:srgbClr val="EEEAFE"/>
-            </a:solidFill>
-          </a:ln>
-        </p:spPr>
-        <p:style>
-          <a:lnRef idx="1">
-            <a:schemeClr val="accent1"/>
-          </a:lnRef>
-          <a:fillRef idx="3">
-            <a:schemeClr val="accent1"/>
-          </a:fillRef>
-          <a:effectRef idx="2">
-            <a:schemeClr val="accent1"/>
-          </a:effectRef>
-          <a:fontRef idx="minor">
-            <a:schemeClr val="lt1"/>
-          </a:fontRef>
-        </p:style>
-        <p:txBody>
-          <a:bodyPr rtlCol="0" anchor="ctr"/>
-          <a:lstStyle/>
-          <a:p>
-            <a:pPr algn="ctr"/>
-          </a:p>
-        </p:txBody>
-      </p:sp>
-      <p:sp>
-        <p:nvSpPr>
-          <p:cNvPr id="11" name="TextBox 10"/>
-          <p:cNvSpPr txBox="1"/>
-          <p:nvPr/>
-        </p:nvSpPr>
-        <p:spPr>
-          <a:xfrm>
-            <a:off x="7781544" y="1773936"/>
-            <a:ext cx="1124712" cy="246888"/>
-          </a:xfrm>
-          <a:prstGeom prst="rect">
-            <a:avLst/>
-          </a:prstGeom>
-          <a:noFill/>
-        </p:spPr>
-        <p:txBody>
-          <a:bodyPr wrap="square" lIns="0" rIns="0" tIns="0" bIns="0" anchor="ctr">
-            <a:spAutoFit/>
-          </a:bodyPr>
-          <a:lstStyle/>
-          <a:p>
-            <a:pPr algn="ctr"/>
-            <a:r>
-              <a:rPr sz="900" b="1">
-                <a:solidFill>
-                  <a:srgbClr val="6D5DFB"/>
-                </a:solidFill>
-                <a:latin typeface="Aptos"/>
-              </a:rPr>
-              <a:t>WHAT IT DOES</a:t>
-            </a:r>
-          </a:p>
-        </p:txBody>
-      </p:sp>
-      <p:sp>
-        <p:nvSpPr>
-          <p:cNvPr id="12" name="TextBox 11"/>
-          <p:cNvSpPr txBox="1"/>
-          <p:nvPr/>
-        </p:nvSpPr>
-        <p:spPr>
-          <a:xfrm>
-            <a:off x="9098280" y="1737360"/>
-            <a:ext cx="2286000" cy="512064"/>
-          </a:xfrm>
-          <a:prstGeom prst="rect">
-            <a:avLst/>
-          </a:prstGeom>
-          <a:noFill/>
-        </p:spPr>
-        <p:txBody>
-          <a:bodyPr wrap="square" lIns="0" rIns="0" tIns="0" bIns="0" anchor="ctr">
-            <a:spAutoFit/>
-          </a:bodyPr>
-          <a:lstStyle/>
-          <a:p>
-            <a:pPr algn="l"/>
-            <a:r>
-              <a:rPr sz="1050" b="0">
-                <a:solidFill>
-                  <a:srgbClr val="151A2D"/>
-                </a:solidFill>
-                <a:latin typeface="Aptos"/>
-              </a:rPr>
-              <a:t>Wipes generated code; leaves two operations done and getCharacter unmapped.</a:t>
-            </a:r>
-          </a:p>
-        </p:txBody>
-      </p:sp>
-      <p:sp>
-        <p:nvSpPr>
-          <p:cNvPr id="13" name="Rounded Rectangle 12"/>
-          <p:cNvSpPr/>
-          <p:nvPr/>
-        </p:nvSpPr>
-        <p:spPr>
-          <a:xfrm>
-            <a:off x="7726679" y="2798063"/>
-            <a:ext cx="1234440" cy="292608"/>
-          </a:xfrm>
-          <a:prstGeom prst="roundRect">
-            <a:avLst/>
-          </a:prstGeom>
-          <a:solidFill>
-            <a:srgbClr val="FFF3DB"/>
-          </a:solidFill>
-          <a:ln>
-            <a:solidFill>
-              <a:srgbClr val="FFF3DB"/>
-            </a:solidFill>
-          </a:ln>
-        </p:spPr>
-        <p:style>
-          <a:lnRef idx="1">
-            <a:schemeClr val="accent1"/>
-          </a:lnRef>
-          <a:fillRef idx="3">
-            <a:schemeClr val="accent1"/>
-          </a:fillRef>
-          <a:effectRef idx="2">
-            <a:schemeClr val="accent1"/>
-          </a:effectRef>
-          <a:fontRef idx="minor">
-            <a:schemeClr val="lt1"/>
-          </a:fontRef>
-        </p:style>
-        <p:txBody>
-          <a:bodyPr rtlCol="0" anchor="ctr"/>
-          <a:lstStyle/>
-          <a:p>
-            <a:pPr algn="ctr"/>
-          </a:p>
-        </p:txBody>
-      </p:sp>
-      <p:sp>
-        <p:nvSpPr>
-          <p:cNvPr id="14" name="TextBox 13"/>
-          <p:cNvSpPr txBox="1"/>
-          <p:nvPr/>
-        </p:nvSpPr>
-        <p:spPr>
-          <a:xfrm>
-            <a:off x="7781544" y="2816351"/>
-            <a:ext cx="1124712" cy="246888"/>
-          </a:xfrm>
-          <a:prstGeom prst="rect">
-            <a:avLst/>
-          </a:prstGeom>
-          <a:noFill/>
-        </p:spPr>
-        <p:txBody>
-          <a:bodyPr wrap="square" lIns="0" rIns="0" tIns="0" bIns="0" anchor="ctr">
-            <a:spAutoFit/>
-          </a:bodyPr>
-          <a:lstStyle/>
-          <a:p>
-            <a:pPr algn="ctr"/>
-            <a:r>
-              <a:rPr sz="900" b="1">
-                <a:solidFill>
-                  <a:srgbClr val="B56C00"/>
-                </a:solidFill>
-                <a:latin typeface="Aptos"/>
-              </a:rPr>
-              <a:t>WHY</a:t>
-            </a:r>
-          </a:p>
-        </p:txBody>
-      </p:sp>
-      <p:sp>
-        <p:nvSpPr>
-          <p:cNvPr id="15" name="TextBox 14"/>
-          <p:cNvSpPr txBox="1"/>
-          <p:nvPr/>
-        </p:nvSpPr>
-        <p:spPr>
-          <a:xfrm>
-            <a:off x="9098280" y="2779775"/>
-            <a:ext cx="2286000" cy="512064"/>
-          </a:xfrm>
-          <a:prstGeom prst="rect">
-            <a:avLst/>
-          </a:prstGeom>
-          <a:noFill/>
-        </p:spPr>
-        <p:txBody>
-          <a:bodyPr wrap="square" lIns="0" rIns="0" tIns="0" bIns="0" anchor="ctr">
-            <a:spAutoFit/>
-          </a:bodyPr>
-          <a:lstStyle/>
-          <a:p>
-            <a:pPr algn="l"/>
-            <a:r>
-              <a:rPr sz="1050" b="0">
-                <a:solidFill>
-                  <a:srgbClr val="151A2D"/>
-                </a:solidFill>
-                <a:latin typeface="Aptos"/>
-              </a:rPr>
-              <a:t>One operation and two agent calls fit in six minutes.</a:t>
-            </a:r>
-          </a:p>
-        </p:txBody>
-      </p:sp>
-      <p:sp>
-        <p:nvSpPr>
-          <p:cNvPr id="16" name="Rounded Rectangle 15"/>
-          <p:cNvSpPr/>
-          <p:nvPr/>
-        </p:nvSpPr>
-        <p:spPr>
-          <a:xfrm>
-            <a:off x="7726679" y="3840479"/>
-            <a:ext cx="1234440" cy="292608"/>
-          </a:xfrm>
-          <a:prstGeom prst="roundRect">
-            <a:avLst/>
-          </a:prstGeom>
-          <a:solidFill>
-            <a:srgbClr val="EEEAFE"/>
-          </a:solidFill>
-          <a:ln>
-            <a:solidFill>
-              <a:srgbClr val="EEEAFE"/>
-            </a:solidFill>
-          </a:ln>
-        </p:spPr>
-        <p:style>
-          <a:lnRef idx="1">
-            <a:schemeClr val="accent1"/>
-          </a:lnRef>
-          <a:fillRef idx="3">
-            <a:schemeClr val="accent1"/>
-          </a:fillRef>
-          <a:effectRef idx="2">
-            <a:schemeClr val="accent1"/>
-          </a:effectRef>
-          <a:fontRef idx="minor">
-            <a:schemeClr val="lt1"/>
-          </a:fontRef>
-        </p:style>
-        <p:txBody>
-          <a:bodyPr rtlCol="0" anchor="ctr"/>
-          <a:lstStyle/>
-          <a:p>
-            <a:pPr algn="ctr"/>
-          </a:p>
-        </p:txBody>
-      </p:sp>
-      <p:sp>
-        <p:nvSpPr>
-          <p:cNvPr id="17" name="TextBox 16"/>
-          <p:cNvSpPr txBox="1"/>
-          <p:nvPr/>
-        </p:nvSpPr>
-        <p:spPr>
-          <a:xfrm>
-            <a:off x="7781544" y="3858767"/>
-            <a:ext cx="1124712" cy="246888"/>
-          </a:xfrm>
-          <a:prstGeom prst="rect">
-            <a:avLst/>
-          </a:prstGeom>
-          <a:noFill/>
-        </p:spPr>
-        <p:txBody>
-          <a:bodyPr wrap="square" lIns="0" rIns="0" tIns="0" bIns="0" anchor="ctr">
-            <a:spAutoFit/>
-          </a:bodyPr>
-          <a:lstStyle/>
-          <a:p>
-            <a:pPr algn="ctr"/>
-            <a:r>
-              <a:rPr sz="900" b="1">
-                <a:solidFill>
-                  <a:srgbClr val="6D5DFB"/>
-                </a:solidFill>
-                <a:latin typeface="Aptos"/>
-              </a:rPr>
-              <a:t>CHECK</a:t>
-            </a:r>
-          </a:p>
-        </p:txBody>
-      </p:sp>
-      <p:sp>
-        <p:nvSpPr>
-          <p:cNvPr id="18" name="TextBox 17"/>
-          <p:cNvSpPr txBox="1"/>
-          <p:nvPr/>
-        </p:nvSpPr>
-        <p:spPr>
-          <a:xfrm>
-            <a:off x="9098280" y="3822191"/>
-            <a:ext cx="2286000" cy="512064"/>
-          </a:xfrm>
-          <a:prstGeom prst="rect">
-            <a:avLst/>
-          </a:prstGeom>
-          <a:noFill/>
-        </p:spPr>
-        <p:txBody>
-          <a:bodyPr wrap="square" lIns="0" rIns="0" tIns="0" bIns="0" anchor="ctr">
-            <a:spAutoFit/>
-          </a:bodyPr>
-          <a:lstStyle/>
-          <a:p>
-            <a:pPr algn="l"/>
-            <a:r>
-              <a:rPr sz="1050" b="0">
-                <a:solidFill>
-                  <a:srgbClr val="151A2D"/>
-                </a:solidFill>
-                <a:latin typeface="Aptos"/>
-              </a:rPr>
-              <a:t>map --check prints two approved rows and one missing.</a:t>
-            </a:r>
-          </a:p>
-        </p:txBody>
-      </p:sp>
-      <p:sp>
-        <p:nvSpPr>
-          <p:cNvPr id="19" name="Rounded Rectangle 18"/>
-          <p:cNvSpPr/>
-          <p:nvPr/>
-        </p:nvSpPr>
-        <p:spPr>
-          <a:xfrm>
-            <a:off x="7726679" y="4882896"/>
-            <a:ext cx="1234440" cy="292608"/>
-          </a:xfrm>
-          <a:prstGeom prst="roundRect">
-            <a:avLst/>
-          </a:prstGeom>
-          <a:solidFill>
-            <a:srgbClr val="EEEAFE"/>
-          </a:solidFill>
-          <a:ln>
-            <a:solidFill>
-              <a:srgbClr val="EEEAFE"/>
-            </a:solidFill>
-          </a:ln>
-        </p:spPr>
-        <p:style>
-          <a:lnRef idx="1">
-            <a:schemeClr val="accent1"/>
-          </a:lnRef>
-          <a:fillRef idx="3">
-            <a:schemeClr val="accent1"/>
-          </a:fillRef>
-          <a:effectRef idx="2">
-            <a:schemeClr val="accent1"/>
-          </a:effectRef>
-          <a:fontRef idx="minor">
-            <a:schemeClr val="lt1"/>
-          </a:fontRef>
-        </p:style>
-        <p:txBody>
-          <a:bodyPr rtlCol="0" anchor="ctr"/>
-          <a:lstStyle/>
-          <a:p>
-            <a:pPr algn="ctr"/>
-          </a:p>
-        </p:txBody>
-      </p:sp>
-      <p:sp>
-        <p:nvSpPr>
-          <p:cNvPr id="20" name="TextBox 19"/>
-          <p:cNvSpPr txBox="1"/>
-          <p:nvPr/>
-        </p:nvSpPr>
-        <p:spPr>
-          <a:xfrm>
-            <a:off x="7781544" y="4901183"/>
-            <a:ext cx="1124712" cy="246888"/>
-          </a:xfrm>
-          <a:prstGeom prst="rect">
-            <a:avLst/>
-          </a:prstGeom>
-          <a:noFill/>
-        </p:spPr>
-        <p:txBody>
-          <a:bodyPr wrap="square" lIns="0" rIns="0" tIns="0" bIns="0" anchor="ctr">
-            <a:spAutoFit/>
-          </a:bodyPr>
-          <a:lstStyle/>
-          <a:p>
-            <a:pPr algn="ctr"/>
-            <a:r>
-              <a:rPr sz="900" b="1">
-                <a:solidFill>
-                  <a:srgbClr val="6D5DFB"/>
-                </a:solidFill>
-                <a:latin typeface="Aptos"/>
-              </a:rPr>
-              <a:t>IF IT FAILS</a:t>
-            </a:r>
-          </a:p>
-        </p:txBody>
-      </p:sp>
-      <p:sp>
-        <p:nvSpPr>
-          <p:cNvPr id="21" name="TextBox 20"/>
-          <p:cNvSpPr txBox="1"/>
-          <p:nvPr/>
-        </p:nvSpPr>
-        <p:spPr>
-          <a:xfrm>
-            <a:off x="9098280" y="4864608"/>
-            <a:ext cx="2286000" cy="512064"/>
-          </a:xfrm>
-          <a:prstGeom prst="rect">
-            <a:avLst/>
-          </a:prstGeom>
-          <a:noFill/>
-        </p:spPr>
-        <p:txBody>
-          <a:bodyPr wrap="square" lIns="0" rIns="0" tIns="0" bIns="0" anchor="ctr">
-            <a:spAutoFit/>
-          </a:bodyPr>
-          <a:lstStyle/>
-          <a:p>
-            <a:pPr algn="l"/>
-            <a:r>
-              <a:rPr sz="1050" b="0">
-                <a:solidFill>
-                  <a:srgbClr val="151A2D"/>
-                </a:solidFill>
-                <a:latin typeface="Aptos"/>
-              </a:rPr>
-              <a:t>Run it again (it is idempotent), then build the CLI once.</a:t>
-            </a:r>
-          </a:p>
-        </p:txBody>
-      </p:sp>
-    </p:spTree>
-  </p:cSld>
-  <p:clrMapOvr>
-    <a:masterClrMapping/>
-  </p:clrMapOvr>
-</p:sld>
-</file>
-
-<file path=ppt/slides/slide14.xml><?xml version="1.0" encoding="utf-8"?>
-<p:sld xmlns:a="http://schemas.openxmlformats.org/drawingml/2006/main" xmlns:p="http://schemas.openxmlformats.org/presentationml/2006/main" xmlns:r="http://schemas.openxmlformats.org/officeDocument/2006/relationships">
-  <p:cSld>
-    <p:bg>
-      <p:bgPr>
-        <a:solidFill>
-          <a:srgbClr val="F7F8FC"/>
-        </a:solidFill>
-        <a:effectLst/>
-      </p:bgPr>
-    </p:bg>
-    <p:spTree>
-      <p:nvGrpSpPr>
-        <p:cNvPr id="1" name=""/>
-        <p:cNvGrpSpPr/>
-        <p:nvPr/>
-      </p:nvGrpSpPr>
-      <p:grpSpPr/>
-      <p:sp>
-        <p:nvSpPr>
-          <p:cNvPr id="2" name="Rectangle 1"/>
-          <p:cNvSpPr/>
-          <p:nvPr/>
-        </p:nvSpPr>
-        <p:spPr>
-          <a:xfrm>
-            <a:off x="0" y="0"/>
-            <a:ext cx="12191695" cy="91440"/>
-          </a:xfrm>
-          <a:prstGeom prst="rect">
-            <a:avLst/>
-          </a:prstGeom>
-          <a:solidFill>
-            <a:srgbClr val="6D5DFB"/>
-          </a:solidFill>
-          <a:ln>
-            <a:solidFill>
-              <a:srgbClr val="6D5DFB"/>
-            </a:solidFill>
-          </a:ln>
-        </p:spPr>
-        <p:style>
-          <a:lnRef idx="1">
-            <a:schemeClr val="accent1"/>
-          </a:lnRef>
-          <a:fillRef idx="3">
-            <a:schemeClr val="accent1"/>
-          </a:fillRef>
-          <a:effectRef idx="2">
-            <a:schemeClr val="accent1"/>
-          </a:effectRef>
-          <a:fontRef idx="minor">
-            <a:schemeClr val="lt1"/>
-          </a:fontRef>
-        </p:style>
-        <p:txBody>
-          <a:bodyPr rtlCol="0" anchor="ctr"/>
-          <a:lstStyle/>
-          <a:p>
-            <a:pPr algn="ctr"/>
-          </a:p>
-        </p:txBody>
-      </p:sp>
-      <p:sp>
-        <p:nvSpPr>
-          <p:cNvPr id="3" name="TextBox 2"/>
-          <p:cNvSpPr txBox="1"/>
-          <p:nvPr/>
-        </p:nvSpPr>
-        <p:spPr>
-          <a:xfrm>
-            <a:off x="502920" y="6519672"/>
-            <a:ext cx="5486400" cy="146304"/>
-          </a:xfrm>
-          <a:prstGeom prst="rect">
-            <a:avLst/>
-          </a:prstGeom>
-          <a:noFill/>
-        </p:spPr>
-        <p:txBody>
-          <a:bodyPr wrap="square" lIns="0" rIns="0" tIns="0" bIns="0" anchor="ctr">
-            <a:spAutoFit/>
-          </a:bodyPr>
-          <a:lstStyle/>
-          <a:p>
-            <a:pPr algn="l"/>
-            <a:r>
-              <a:rPr sz="750" b="0">
-                <a:solidFill>
-                  <a:srgbClr val="7B8190"/>
-                </a:solidFill>
-                <a:latin typeface="Aptos"/>
-              </a:rPr>
-              <a:t>ALLATA  |  AI-ASSISTED INTEGRATION</a:t>
-            </a:r>
-          </a:p>
-        </p:txBody>
-      </p:sp>
-      <p:sp>
-        <p:nvSpPr>
-          <p:cNvPr id="4" name="TextBox 3"/>
-          <p:cNvSpPr txBox="1"/>
-          <p:nvPr/>
-        </p:nvSpPr>
-        <p:spPr>
-          <a:xfrm>
-            <a:off x="11384280" y="6519672"/>
-            <a:ext cx="320040" cy="146304"/>
-          </a:xfrm>
-          <a:prstGeom prst="rect">
-            <a:avLst/>
-          </a:prstGeom>
-          <a:noFill/>
-        </p:spPr>
-        <p:txBody>
-          <a:bodyPr wrap="square" lIns="0" rIns="0" tIns="0" bIns="0" anchor="ctr">
-            <a:spAutoFit/>
-          </a:bodyPr>
-          <a:lstStyle/>
-          <a:p>
-            <a:pPr algn="r"/>
-            <a:r>
-              <a:rPr sz="750" b="0">
-                <a:solidFill>
-                  <a:srgbClr val="9AA0AE"/>
-                </a:solidFill>
-                <a:latin typeface="Aptos"/>
-              </a:rPr>
-              <a:t>14</a:t>
-            </a:r>
-          </a:p>
-        </p:txBody>
-      </p:sp>
-      <p:sp>
-        <p:nvSpPr>
-          <p:cNvPr id="5" name="TextBox 4"/>
-          <p:cNvSpPr txBox="1"/>
-          <p:nvPr/>
-        </p:nvSpPr>
-        <p:spPr>
-          <a:xfrm>
-            <a:off x="566928" y="310896"/>
-            <a:ext cx="3657600" cy="219456"/>
-          </a:xfrm>
-          <a:prstGeom prst="rect">
-            <a:avLst/>
-          </a:prstGeom>
-          <a:noFill/>
-        </p:spPr>
-        <p:txBody>
-          <a:bodyPr wrap="square" lIns="0" rIns="0" tIns="0" bIns="0" anchor="ctr">
-            <a:spAutoFit/>
-          </a:bodyPr>
-          <a:lstStyle/>
-          <a:p>
-            <a:pPr algn="l"/>
-            <a:r>
-              <a:rPr sz="900" b="1">
-                <a:solidFill>
-                  <a:srgbClr val="6D5DFB"/>
-                </a:solidFill>
-                <a:latin typeface="Aptos"/>
-              </a:rPr>
-              <a:t>12 — DEMO STEP 2</a:t>
-            </a:r>
-          </a:p>
-        </p:txBody>
-      </p:sp>
-      <p:sp>
-        <p:nvSpPr>
-          <p:cNvPr id="6" name="TextBox 5"/>
-          <p:cNvSpPr txBox="1"/>
-          <p:nvPr/>
-        </p:nvSpPr>
-        <p:spPr>
-          <a:xfrm>
-            <a:off x="566928" y="621792"/>
-            <a:ext cx="10972800" cy="521207"/>
-          </a:xfrm>
-          <a:prstGeom prst="rect">
-            <a:avLst/>
-          </a:prstGeom>
-          <a:noFill/>
-        </p:spPr>
-        <p:txBody>
-          <a:bodyPr wrap="square" lIns="0" rIns="0" tIns="0" bIns="0" anchor="ctr">
-            <a:spAutoFit/>
-          </a:bodyPr>
-          <a:lstStyle/>
-          <a:p>
-            <a:pPr algn="l"/>
-            <a:r>
-              <a:rPr sz="2800" b="1">
-                <a:solidFill>
-                  <a:srgbClr val="151A2D"/>
-                </a:solidFill>
-                <a:latin typeface="Aptos"/>
-              </a:rPr>
-              <a:t>One prompt to the orchestrator</a:t>
-            </a:r>
-          </a:p>
-        </p:txBody>
-      </p:sp>
-      <p:sp>
-        <p:nvSpPr>
-          <p:cNvPr id="7" name="TextBox 6"/>
-          <p:cNvSpPr txBox="1"/>
-          <p:nvPr/>
-        </p:nvSpPr>
-        <p:spPr>
-          <a:xfrm>
-            <a:off x="566928" y="1179576"/>
-            <a:ext cx="10881360" cy="347472"/>
-          </a:xfrm>
-          <a:prstGeom prst="rect">
-            <a:avLst/>
-          </a:prstGeom>
-          <a:noFill/>
-        </p:spPr>
-        <p:txBody>
-          <a:bodyPr wrap="square" lIns="0" rIns="0" tIns="0" bIns="0" anchor="ctr">
-            <a:spAutoFit/>
-          </a:bodyPr>
-          <a:lstStyle/>
-          <a:p>
-            <a:pPr algn="l"/>
-            <a:r>
-              <a:rPr sz="1300" b="0">
-                <a:solidFill>
-                  <a:srgbClr val="626A7A"/>
-                </a:solidFill>
-                <a:latin typeface="Aptos"/>
-              </a:rPr>
-              <a:t>Paste into Copilot chat. Then do not touch the keyboard until it asks you something.</a:t>
-            </a:r>
-          </a:p>
-        </p:txBody>
-      </p:sp>
-      <p:sp>
-        <p:nvSpPr>
-          <p:cNvPr id="8" name="Rounded Rectangle 7"/>
-          <p:cNvSpPr/>
-          <p:nvPr/>
-        </p:nvSpPr>
-        <p:spPr>
-          <a:xfrm>
-            <a:off x="621792" y="1664208"/>
-            <a:ext cx="6720840" cy="4343400"/>
-          </a:xfrm>
-          <a:prstGeom prst="roundRect">
-            <a:avLst/>
-          </a:prstGeom>
-          <a:solidFill>
-            <a:srgbClr val="101426"/>
-          </a:solidFill>
-          <a:ln>
-            <a:solidFill>
-              <a:srgbClr val="101426"/>
-            </a:solidFill>
-          </a:ln>
-        </p:spPr>
-        <p:style>
-          <a:lnRef idx="1">
-            <a:schemeClr val="accent1"/>
-          </a:lnRef>
-          <a:fillRef idx="3">
-            <a:schemeClr val="accent1"/>
-          </a:fillRef>
-          <a:effectRef idx="2">
-            <a:schemeClr val="accent1"/>
-          </a:effectRef>
-          <a:fontRef idx="minor">
-            <a:schemeClr val="lt1"/>
-          </a:fontRef>
-        </p:style>
-        <p:txBody>
-          <a:bodyPr rtlCol="0" anchor="ctr"/>
-          <a:lstStyle/>
-          <a:p>
-            <a:pPr algn="ctr"/>
-          </a:p>
-        </p:txBody>
-      </p:sp>
-      <p:sp>
-        <p:nvSpPr>
-          <p:cNvPr id="9" name="TextBox 8"/>
-          <p:cNvSpPr txBox="1"/>
-          <p:nvPr/>
-        </p:nvSpPr>
-        <p:spPr>
-          <a:xfrm>
-            <a:off x="914400" y="1901952"/>
-            <a:ext cx="6126480" cy="3794760"/>
-          </a:xfrm>
-          <a:prstGeom prst="rect">
-            <a:avLst/>
-          </a:prstGeom>
-          <a:noFill/>
-        </p:spPr>
-        <p:txBody>
-          <a:bodyPr wrap="square" lIns="0" rIns="0" tIns="0" bIns="0" anchor="t">
-            <a:spAutoFit/>
-          </a:bodyPr>
-          <a:lstStyle/>
-          <a:p>
-            <a:pPr algn="l"/>
-            <a:r>
-              <a:rPr sz="1150" b="0">
-                <a:solidFill>
-                  <a:srgbClr val="D9E0F4"/>
-                </a:solidFill>
-                <a:latin typeface="Courier New"/>
-              </a:rPr>
-              <a:t>@orchestrator Run the integration factory for</a:t>
-            </a:r>
-            <a:br/>
-            <a:r>
-              <a:rPr sz="1150" b="0">
-                <a:solidFill>
-                  <a:srgbClr val="D9E0F4"/>
-                </a:solidFill>
-                <a:latin typeface="Courier New"/>
-              </a:rPr>
-              <a:t>connector swapi, operation getCharacter.</a:t>
-            </a:r>
-            <a:br/>
-            <a:r>
-              <a:rPr sz="1150" b="0">
-                <a:solidFill>
-                  <a:srgbClr val="D9E0F4"/>
-                </a:solidFill>
-                <a:latin typeface="Courier New"/>
-              </a:rPr>
-              <a:t>Run validate with --smoke at the end.</a:t>
-            </a:r>
-            <a:br/>
-            <a:r>
-              <a:rPr sz="1150" b="0">
-                <a:solidFill>
-                  <a:srgbClr val="D9E0F4"/>
-                </a:solidFill>
-                <a:latin typeface="Courier New"/>
-              </a:rPr>
-              <a:t/>
-            </a:r>
-            <a:br/>
-            <a:r>
-              <a:rPr sz="1150" b="0">
-                <a:solidFill>
-                  <a:srgbClr val="D9E0F4"/>
-                </a:solidFill>
-                <a:latin typeface="Courier New"/>
-              </a:rPr>
-              <a:t>What you will see in the terminal, in order:</a:t>
-            </a:r>
-            <a:br/>
-            <a:r>
-              <a:rPr sz="1150" b="0">
-                <a:solidFill>
-                  <a:srgbClr val="D9E0F4"/>
-                </a:solidFill>
-                <a:latin typeface="Courier New"/>
-              </a:rPr>
-              <a:t>  P0  map --check   (2 approved, getCharacter missing)</a:t>
-            </a:r>
-            <a:br/>
-            <a:r>
-              <a:rPr sz="1150" b="0">
-                <a:solidFill>
-                  <a:srgbClr val="D9E0F4"/>
-                </a:solidFill>
-                <a:latin typeface="Courier New"/>
-              </a:rPr>
-              <a:t>  P2  import        (client + models regenerated)</a:t>
-            </a:r>
-            <a:br/>
-            <a:r>
-              <a:rPr sz="1150" b="0">
-                <a:solidFill>
-                  <a:srgbClr val="D9E0F4"/>
-                </a:solidFill>
-                <a:latin typeface="Courier New"/>
-              </a:rPr>
-              <a:t>  P3  map           (brief -&gt; mapping-agent -&gt; JSON)</a:t>
-            </a:r>
-            <a:br/>
-            <a:r>
-              <a:rPr sz="1150" b="0">
-                <a:solidFill>
-                  <a:srgbClr val="D9E0F4"/>
-                </a:solidFill>
-                <a:latin typeface="Courier New"/>
-              </a:rPr>
-              <a:t>  P3  map --check   (birth_year 0.62, gender 0.55)</a:t>
-            </a:r>
-            <a:br/>
-            <a:r>
-              <a:rPr sz="1150" b="0">
-                <a:solidFill>
-                  <a:srgbClr val="D9E0F4"/>
-                </a:solidFill>
-                <a:latin typeface="Courier New"/>
-              </a:rPr>
-              <a:t>  --  it STOPS and asks you two questions</a:t>
-            </a:r>
-            <a:br/>
-            <a:r>
-              <a:rPr sz="1150" b="0">
-                <a:solidFill>
-                  <a:srgbClr val="D9E0F4"/>
-                </a:solidFill>
-                <a:latin typeface="Courier New"/>
-              </a:rPr>
-              <a:t/>
-            </a:r>
-            <a:br/>
-            <a:r>
-              <a:rPr sz="1150" b="0">
-                <a:solidFill>
-                  <a:srgbClr val="D9E0F4"/>
-                </a:solidFill>
-                <a:latin typeface="Courier New"/>
-              </a:rPr>
-              <a:t/>
-            </a:r>
-            <a:br/>
-            <a:r>
-              <a:rPr sz="1150" b="0">
-                <a:solidFill>
-                  <a:srgbClr val="D9E0F4"/>
-                </a:solidFill>
-                <a:latin typeface="Courier New"/>
-              </a:rPr>
-              <a:t/>
-            </a:r>
-            <a:br/>
-            <a:r>
-              <a:rPr sz="1150" b="0">
-                <a:solidFill>
-                  <a:srgbClr val="D9E0F4"/>
-                </a:solidFill>
-                <a:latin typeface="Courier New"/>
-              </a:rPr>
-              <a:t/>
-            </a:r>
-            <a:br/>
-            <a:r>
-              <a:rPr sz="1150" b="0">
-                <a:solidFill>
-                  <a:srgbClr val="D9E0F4"/>
-                </a:solidFill>
-                <a:latin typeface="Courier New"/>
-              </a:rPr>
-              <a:t/>
-            </a:r>
-          </a:p>
-        </p:txBody>
-      </p:sp>
-      <p:sp>
-        <p:nvSpPr>
-          <p:cNvPr id="10" name="Rounded Rectangle 9"/>
-          <p:cNvSpPr/>
-          <p:nvPr/>
-        </p:nvSpPr>
-        <p:spPr>
-          <a:xfrm>
-            <a:off x="7726679" y="1755648"/>
-            <a:ext cx="1234440" cy="292608"/>
-          </a:xfrm>
-          <a:prstGeom prst="roundRect">
-            <a:avLst/>
-          </a:prstGeom>
-          <a:solidFill>
-            <a:srgbClr val="EEEAFE"/>
-          </a:solidFill>
-          <a:ln>
-            <a:solidFill>
-              <a:srgbClr val="EEEAFE"/>
-            </a:solidFill>
-          </a:ln>
-        </p:spPr>
-        <p:style>
-          <a:lnRef idx="1">
-            <a:schemeClr val="accent1"/>
-          </a:lnRef>
-          <a:fillRef idx="3">
-            <a:schemeClr val="accent1"/>
-          </a:fillRef>
-          <a:effectRef idx="2">
-            <a:schemeClr val="accent1"/>
-          </a:effectRef>
-          <a:fontRef idx="minor">
-            <a:schemeClr val="lt1"/>
-          </a:fontRef>
-        </p:style>
-        <p:txBody>
-          <a:bodyPr rtlCol="0" anchor="ctr"/>
-          <a:lstStyle/>
-          <a:p>
-            <a:pPr algn="ctr"/>
-          </a:p>
-        </p:txBody>
-      </p:sp>
-      <p:sp>
-        <p:nvSpPr>
-          <p:cNvPr id="11" name="TextBox 10"/>
-          <p:cNvSpPr txBox="1"/>
-          <p:nvPr/>
-        </p:nvSpPr>
-        <p:spPr>
-          <a:xfrm>
-            <a:off x="7781544" y="1773936"/>
-            <a:ext cx="1124712" cy="246888"/>
-          </a:xfrm>
-          <a:prstGeom prst="rect">
-            <a:avLst/>
-          </a:prstGeom>
-          <a:noFill/>
-        </p:spPr>
-        <p:txBody>
-          <a:bodyPr wrap="square" lIns="0" rIns="0" tIns="0" bIns="0" anchor="ctr">
-            <a:spAutoFit/>
-          </a:bodyPr>
-          <a:lstStyle/>
-          <a:p>
-            <a:pPr algn="ctr"/>
-            <a:r>
-              <a:rPr sz="900" b="1">
-                <a:solidFill>
-                  <a:srgbClr val="6D5DFB"/>
-                </a:solidFill>
-                <a:latin typeface="Aptos"/>
-              </a:rPr>
-              <a:t>WHAT IT DOES</a:t>
-            </a:r>
-          </a:p>
-        </p:txBody>
-      </p:sp>
-      <p:sp>
-        <p:nvSpPr>
-          <p:cNvPr id="12" name="TextBox 11"/>
-          <p:cNvSpPr txBox="1"/>
-          <p:nvPr/>
-        </p:nvSpPr>
-        <p:spPr>
-          <a:xfrm>
-            <a:off x="9098280" y="1737360"/>
-            <a:ext cx="2286000" cy="512064"/>
-          </a:xfrm>
-          <a:prstGeom prst="rect">
-            <a:avLst/>
-          </a:prstGeom>
-          <a:noFill/>
-        </p:spPr>
-        <p:txBody>
-          <a:bodyPr wrap="square" lIns="0" rIns="0" tIns="0" bIns="0" anchor="ctr">
-            <a:spAutoFit/>
-          </a:bodyPr>
-          <a:lstStyle/>
-          <a:p>
-            <a:pPr algn="l"/>
-            <a:r>
-              <a:rPr sz="1050" b="0">
-                <a:solidFill>
-                  <a:srgbClr val="151A2D"/>
-                </a:solidFill>
-                <a:latin typeface="Aptos"/>
-              </a:rPr>
-              <a:t>Reads state from the CLI, regenerates, sends a 1,400-token brief to the mapping agent, checks the result.</a:t>
-            </a:r>
-          </a:p>
-        </p:txBody>
-      </p:sp>
-      <p:sp>
-        <p:nvSpPr>
-          <p:cNvPr id="13" name="Rounded Rectangle 12"/>
-          <p:cNvSpPr/>
-          <p:nvPr/>
-        </p:nvSpPr>
-        <p:spPr>
-          <a:xfrm>
-            <a:off x="7726679" y="2798063"/>
-            <a:ext cx="1234440" cy="292608"/>
-          </a:xfrm>
-          <a:prstGeom prst="roundRect">
-            <a:avLst/>
-          </a:prstGeom>
-          <a:solidFill>
-            <a:srgbClr val="FFF3DB"/>
-          </a:solidFill>
-          <a:ln>
-            <a:solidFill>
-              <a:srgbClr val="FFF3DB"/>
-            </a:solidFill>
-          </a:ln>
-        </p:spPr>
-        <p:style>
-          <a:lnRef idx="1">
-            <a:schemeClr val="accent1"/>
-          </a:lnRef>
-          <a:fillRef idx="3">
-            <a:schemeClr val="accent1"/>
-          </a:fillRef>
-          <a:effectRef idx="2">
-            <a:schemeClr val="accent1"/>
-          </a:effectRef>
-          <a:fontRef idx="minor">
-            <a:schemeClr val="lt1"/>
-          </a:fontRef>
-        </p:style>
-        <p:txBody>
-          <a:bodyPr rtlCol="0" anchor="ctr"/>
-          <a:lstStyle/>
-          <a:p>
-            <a:pPr algn="ctr"/>
-          </a:p>
-        </p:txBody>
-      </p:sp>
-      <p:sp>
-        <p:nvSpPr>
-          <p:cNvPr id="14" name="TextBox 13"/>
-          <p:cNvSpPr txBox="1"/>
-          <p:nvPr/>
-        </p:nvSpPr>
-        <p:spPr>
-          <a:xfrm>
-            <a:off x="7781544" y="2816351"/>
-            <a:ext cx="1124712" cy="246888"/>
-          </a:xfrm>
-          <a:prstGeom prst="rect">
-            <a:avLst/>
-          </a:prstGeom>
-          <a:noFill/>
-        </p:spPr>
-        <p:txBody>
-          <a:bodyPr wrap="square" lIns="0" rIns="0" tIns="0" bIns="0" anchor="ctr">
-            <a:spAutoFit/>
-          </a:bodyPr>
-          <a:lstStyle/>
-          <a:p>
-            <a:pPr algn="ctr"/>
-            <a:r>
-              <a:rPr sz="900" b="1">
-                <a:solidFill>
-                  <a:srgbClr val="B56C00"/>
-                </a:solidFill>
-                <a:latin typeface="Aptos"/>
-              </a:rPr>
-              <a:t>WATCH FOR</a:t>
-            </a:r>
-          </a:p>
-        </p:txBody>
-      </p:sp>
-      <p:sp>
-        <p:nvSpPr>
-          <p:cNvPr id="15" name="TextBox 14"/>
-          <p:cNvSpPr txBox="1"/>
-          <p:nvPr/>
-        </p:nvSpPr>
-        <p:spPr>
-          <a:xfrm>
-            <a:off x="9098280" y="2779775"/>
-            <a:ext cx="2286000" cy="512064"/>
-          </a:xfrm>
-          <a:prstGeom prst="rect">
-            <a:avLst/>
-          </a:prstGeom>
-          <a:noFill/>
-        </p:spPr>
-        <p:txBody>
-          <a:bodyPr wrap="square" lIns="0" rIns="0" tIns="0" bIns="0" anchor="ctr">
-            <a:spAutoFit/>
-          </a:bodyPr>
-          <a:lstStyle/>
-          <a:p>
-            <a:pPr algn="l"/>
-            <a:r>
-              <a:rPr sz="1050" b="0">
-                <a:solidFill>
-                  <a:srgbClr val="151A2D"/>
-                </a:solidFill>
-                <a:latin typeface="Aptos"/>
-              </a:rPr>
-              <a:t>The mapping-agent call takes 30–60 s. Show the C-3PO tab meanwhile.</a:t>
-            </a:r>
-          </a:p>
-        </p:txBody>
-      </p:sp>
-      <p:sp>
-        <p:nvSpPr>
-          <p:cNvPr id="16" name="Rounded Rectangle 15"/>
-          <p:cNvSpPr/>
-          <p:nvPr/>
-        </p:nvSpPr>
-        <p:spPr>
-          <a:xfrm>
-            <a:off x="7726679" y="3840479"/>
-            <a:ext cx="1234440" cy="292608"/>
-          </a:xfrm>
-          <a:prstGeom prst="roundRect">
-            <a:avLst/>
-          </a:prstGeom>
-          <a:solidFill>
-            <a:srgbClr val="EEEAFE"/>
-          </a:solidFill>
-          <a:ln>
-            <a:solidFill>
-              <a:srgbClr val="EEEAFE"/>
-            </a:solidFill>
-          </a:ln>
-        </p:spPr>
-        <p:style>
-          <a:lnRef idx="1">
-            <a:schemeClr val="accent1"/>
-          </a:lnRef>
-          <a:fillRef idx="3">
-            <a:schemeClr val="accent1"/>
-          </a:fillRef>
-          <a:effectRef idx="2">
-            <a:schemeClr val="accent1"/>
-          </a:effectRef>
-          <a:fontRef idx="minor">
-            <a:schemeClr val="lt1"/>
-          </a:fontRef>
-        </p:style>
-        <p:txBody>
-          <a:bodyPr rtlCol="0" anchor="ctr"/>
-          <a:lstStyle/>
-          <a:p>
-            <a:pPr algn="ctr"/>
-          </a:p>
-        </p:txBody>
-      </p:sp>
-      <p:sp>
-        <p:nvSpPr>
-          <p:cNvPr id="17" name="TextBox 16"/>
-          <p:cNvSpPr txBox="1"/>
-          <p:nvPr/>
-        </p:nvSpPr>
-        <p:spPr>
-          <a:xfrm>
-            <a:off x="7781544" y="3858767"/>
-            <a:ext cx="1124712" cy="246888"/>
-          </a:xfrm>
-          <a:prstGeom prst="rect">
-            <a:avLst/>
-          </a:prstGeom>
-          <a:noFill/>
-        </p:spPr>
-        <p:txBody>
-          <a:bodyPr wrap="square" lIns="0" rIns="0" tIns="0" bIns="0" anchor="ctr">
-            <a:spAutoFit/>
-          </a:bodyPr>
-          <a:lstStyle/>
-          <a:p>
-            <a:pPr algn="ctr"/>
-            <a:r>
-              <a:rPr sz="900" b="1">
-                <a:solidFill>
-                  <a:srgbClr val="6D5DFB"/>
-                </a:solidFill>
-                <a:latin typeface="Aptos"/>
-              </a:rPr>
-              <a:t>SAY</a:t>
-            </a:r>
-          </a:p>
-        </p:txBody>
-      </p:sp>
-      <p:sp>
-        <p:nvSpPr>
-          <p:cNvPr id="18" name="TextBox 17"/>
-          <p:cNvSpPr txBox="1"/>
-          <p:nvPr/>
-        </p:nvSpPr>
-        <p:spPr>
-          <a:xfrm>
-            <a:off x="9098280" y="3822191"/>
-            <a:ext cx="2286000" cy="512064"/>
-          </a:xfrm>
-          <a:prstGeom prst="rect">
-            <a:avLst/>
-          </a:prstGeom>
-          <a:noFill/>
-        </p:spPr>
-        <p:txBody>
-          <a:bodyPr wrap="square" lIns="0" rIns="0" tIns="0" bIns="0" anchor="ctr">
-            <a:spAutoFit/>
-          </a:bodyPr>
-          <a:lstStyle/>
-          <a:p>
-            <a:pPr algn="l"/>
-            <a:r>
-              <a:rPr sz="1050" b="0">
-                <a:solidFill>
-                  <a:srgbClr val="151A2D"/>
-                </a:solidFill>
-                <a:latin typeface="Aptos"/>
-              </a:rPr>
-              <a:t>“It reads state from the tool. It will stop the moment it needs a business decision.”</a:t>
-            </a:r>
-          </a:p>
-        </p:txBody>
-      </p:sp>
-      <p:sp>
-        <p:nvSpPr>
-          <p:cNvPr id="19" name="Rounded Rectangle 18"/>
-          <p:cNvSpPr/>
-          <p:nvPr/>
-        </p:nvSpPr>
-        <p:spPr>
-          <a:xfrm>
-            <a:off x="7726679" y="4882896"/>
-            <a:ext cx="1234440" cy="292608"/>
-          </a:xfrm>
-          <a:prstGeom prst="roundRect">
-            <a:avLst/>
-          </a:prstGeom>
-          <a:solidFill>
-            <a:srgbClr val="EEEAFE"/>
-          </a:solidFill>
-          <a:ln>
-            <a:solidFill>
-              <a:srgbClr val="EEEAFE"/>
-            </a:solidFill>
-          </a:ln>
-        </p:spPr>
-        <p:style>
-          <a:lnRef idx="1">
-            <a:schemeClr val="accent1"/>
-          </a:lnRef>
-          <a:fillRef idx="3">
-            <a:schemeClr val="accent1"/>
-          </a:fillRef>
-          <a:effectRef idx="2">
-            <a:schemeClr val="accent1"/>
-          </a:effectRef>
-          <a:fontRef idx="minor">
-            <a:schemeClr val="lt1"/>
-          </a:fontRef>
-        </p:style>
-        <p:txBody>
-          <a:bodyPr rtlCol="0" anchor="ctr"/>
-          <a:lstStyle/>
-          <a:p>
-            <a:pPr algn="ctr"/>
-          </a:p>
-        </p:txBody>
-      </p:sp>
-      <p:sp>
-        <p:nvSpPr>
-          <p:cNvPr id="20" name="TextBox 19"/>
-          <p:cNvSpPr txBox="1"/>
-          <p:nvPr/>
-        </p:nvSpPr>
-        <p:spPr>
-          <a:xfrm>
-            <a:off x="7781544" y="4901183"/>
-            <a:ext cx="1124712" cy="246888"/>
-          </a:xfrm>
-          <a:prstGeom prst="rect">
-            <a:avLst/>
-          </a:prstGeom>
-          <a:noFill/>
-        </p:spPr>
-        <p:txBody>
-          <a:bodyPr wrap="square" lIns="0" rIns="0" tIns="0" bIns="0" anchor="ctr">
-            <a:spAutoFit/>
-          </a:bodyPr>
-          <a:lstStyle/>
-          <a:p>
-            <a:pPr algn="ctr"/>
-            <a:r>
-              <a:rPr sz="900" b="1">
-                <a:solidFill>
-                  <a:srgbClr val="6D5DFB"/>
-                </a:solidFill>
-                <a:latin typeface="Aptos"/>
-              </a:rPr>
-              <a:t>IF IT STALLS</a:t>
-            </a:r>
-          </a:p>
-        </p:txBody>
-      </p:sp>
-      <p:sp>
-        <p:nvSpPr>
-          <p:cNvPr id="21" name="TextBox 20"/>
-          <p:cNvSpPr txBox="1"/>
-          <p:nvPr/>
-        </p:nvSpPr>
-        <p:spPr>
-          <a:xfrm>
-            <a:off x="9098280" y="4864608"/>
-            <a:ext cx="2286000" cy="512064"/>
-          </a:xfrm>
-          <a:prstGeom prst="rect">
-            <a:avLst/>
-          </a:prstGeom>
-          <a:noFill/>
-        </p:spPr>
-        <p:txBody>
-          <a:bodyPr wrap="square" lIns="0" rIns="0" tIns="0" bIns="0" anchor="ctr">
-            <a:spAutoFit/>
-          </a:bodyPr>
-          <a:lstStyle/>
-          <a:p>
-            <a:pPr algn="l"/>
-            <a:r>
-              <a:rPr sz="1050" b="0">
-                <a:solidFill>
-                  <a:srgbClr val="151A2D"/>
-                </a:solidFill>
-                <a:latin typeface="Aptos"/>
-              </a:rPr>
-              <a:t>Wait two minutes, then reset.ps1 -To mapped and re-send the prompt.</a:t>
-            </a:r>
-          </a:p>
-        </p:txBody>
-      </p:sp>
-    </p:spTree>
-  </p:cSld>
-  <p:clrMapOvr>
-    <a:masterClrMapping/>
-  </p:clrMapOvr>
-</p:sld>
-</file>
-
-<file path=ppt/slides/slide15.xml><?xml version="1.0" encoding="utf-8"?>
-<p:sld xmlns:a="http://schemas.openxmlformats.org/drawingml/2006/main" xmlns:p="http://schemas.openxmlformats.org/presentationml/2006/main" xmlns:r="http://schemas.openxmlformats.org/officeDocument/2006/relationships">
-  <p:cSld>
-    <p:bg>
-      <p:bgPr>
-        <a:solidFill>
-          <a:srgbClr val="F7F8FC"/>
-        </a:solidFill>
-        <a:effectLst/>
-      </p:bgPr>
-    </p:bg>
-    <p:spTree>
-      <p:nvGrpSpPr>
-        <p:cNvPr id="1" name=""/>
-        <p:cNvGrpSpPr/>
-        <p:nvPr/>
-      </p:nvGrpSpPr>
-      <p:grpSpPr/>
-      <p:sp>
-        <p:nvSpPr>
-          <p:cNvPr id="2" name="Rectangle 1"/>
-          <p:cNvSpPr/>
-          <p:nvPr/>
-        </p:nvSpPr>
-        <p:spPr>
-          <a:xfrm>
-            <a:off x="0" y="0"/>
-            <a:ext cx="12191695" cy="91440"/>
-          </a:xfrm>
-          <a:prstGeom prst="rect">
-            <a:avLst/>
-          </a:prstGeom>
-          <a:solidFill>
-            <a:srgbClr val="6D5DFB"/>
-          </a:solidFill>
-          <a:ln>
-            <a:solidFill>
-              <a:srgbClr val="6D5DFB"/>
-            </a:solidFill>
-          </a:ln>
-        </p:spPr>
-        <p:style>
-          <a:lnRef idx="1">
-            <a:schemeClr val="accent1"/>
-          </a:lnRef>
-          <a:fillRef idx="3">
-            <a:schemeClr val="accent1"/>
-          </a:fillRef>
-          <a:effectRef idx="2">
-            <a:schemeClr val="accent1"/>
-          </a:effectRef>
-          <a:fontRef idx="minor">
-            <a:schemeClr val="lt1"/>
-          </a:fontRef>
-        </p:style>
-        <p:txBody>
-          <a:bodyPr rtlCol="0" anchor="ctr"/>
-          <a:lstStyle/>
-          <a:p>
-            <a:pPr algn="ctr"/>
-          </a:p>
-        </p:txBody>
-      </p:sp>
-      <p:sp>
-        <p:nvSpPr>
-          <p:cNvPr id="3" name="TextBox 2"/>
-          <p:cNvSpPr txBox="1"/>
-          <p:nvPr/>
-        </p:nvSpPr>
-        <p:spPr>
-          <a:xfrm>
-            <a:off x="502920" y="6519672"/>
-            <a:ext cx="5486400" cy="146304"/>
-          </a:xfrm>
-          <a:prstGeom prst="rect">
-            <a:avLst/>
-          </a:prstGeom>
-          <a:noFill/>
-        </p:spPr>
-        <p:txBody>
-          <a:bodyPr wrap="square" lIns="0" rIns="0" tIns="0" bIns="0" anchor="ctr">
-            <a:spAutoFit/>
-          </a:bodyPr>
-          <a:lstStyle/>
-          <a:p>
-            <a:pPr algn="l"/>
-            <a:r>
-              <a:rPr sz="750" b="0">
-                <a:solidFill>
-                  <a:srgbClr val="7B8190"/>
-                </a:solidFill>
-                <a:latin typeface="Aptos"/>
-              </a:rPr>
-              <a:t>ALLATA  |  AI-ASSISTED INTEGRATION</a:t>
-            </a:r>
-          </a:p>
-        </p:txBody>
-      </p:sp>
-      <p:sp>
-        <p:nvSpPr>
-          <p:cNvPr id="4" name="TextBox 3"/>
-          <p:cNvSpPr txBox="1"/>
-          <p:nvPr/>
-        </p:nvSpPr>
-        <p:spPr>
-          <a:xfrm>
-            <a:off x="11384280" y="6519672"/>
-            <a:ext cx="320040" cy="146304"/>
-          </a:xfrm>
-          <a:prstGeom prst="rect">
-            <a:avLst/>
-          </a:prstGeom>
-          <a:noFill/>
-        </p:spPr>
-        <p:txBody>
-          <a:bodyPr wrap="square" lIns="0" rIns="0" tIns="0" bIns="0" anchor="ctr">
-            <a:spAutoFit/>
-          </a:bodyPr>
-          <a:lstStyle/>
-          <a:p>
-            <a:pPr algn="r"/>
-            <a:r>
-              <a:rPr sz="750" b="0">
-                <a:solidFill>
-                  <a:srgbClr val="9AA0AE"/>
-                </a:solidFill>
-                <a:latin typeface="Aptos"/>
-              </a:rPr>
-              <a:t>15</a:t>
-            </a:r>
-          </a:p>
-        </p:txBody>
-      </p:sp>
-      <p:sp>
-        <p:nvSpPr>
-          <p:cNvPr id="5" name="TextBox 4"/>
-          <p:cNvSpPr txBox="1"/>
-          <p:nvPr/>
-        </p:nvSpPr>
-        <p:spPr>
-          <a:xfrm>
-            <a:off x="566928" y="310896"/>
-            <a:ext cx="3657600" cy="219456"/>
-          </a:xfrm>
-          <a:prstGeom prst="rect">
-            <a:avLst/>
-          </a:prstGeom>
-          <a:noFill/>
-        </p:spPr>
-        <p:txBody>
-          <a:bodyPr wrap="square" lIns="0" rIns="0" tIns="0" bIns="0" anchor="ctr">
-            <a:spAutoFit/>
-          </a:bodyPr>
-          <a:lstStyle/>
-          <a:p>
-            <a:pPr algn="l"/>
-            <a:r>
-              <a:rPr sz="900" b="1">
-                <a:solidFill>
-                  <a:srgbClr val="6D5DFB"/>
-                </a:solidFill>
-                <a:latin typeface="Aptos"/>
-              </a:rPr>
-              <a:t>12 — DEMO STEP 3</a:t>
-            </a:r>
-          </a:p>
-        </p:txBody>
-      </p:sp>
-      <p:sp>
-        <p:nvSpPr>
-          <p:cNvPr id="6" name="TextBox 5"/>
-          <p:cNvSpPr txBox="1"/>
-          <p:nvPr/>
-        </p:nvSpPr>
-        <p:spPr>
-          <a:xfrm>
-            <a:off x="566928" y="621792"/>
-            <a:ext cx="10972800" cy="521207"/>
-          </a:xfrm>
-          <a:prstGeom prst="rect">
-            <a:avLst/>
-          </a:prstGeom>
-          <a:noFill/>
-        </p:spPr>
-        <p:txBody>
-          <a:bodyPr wrap="square" lIns="0" rIns="0" tIns="0" bIns="0" anchor="ctr">
-            <a:spAutoFit/>
-          </a:bodyPr>
-          <a:lstStyle/>
-          <a:p>
-            <a:pPr algn="l"/>
-            <a:r>
-              <a:rPr sz="2800" b="1">
-                <a:solidFill>
-                  <a:srgbClr val="151A2D"/>
-                </a:solidFill>
-                <a:latin typeface="Aptos"/>
-              </a:rPr>
-              <a:t>The gate: the room decides</a:t>
-            </a:r>
-          </a:p>
-        </p:txBody>
-      </p:sp>
-      <p:sp>
-        <p:nvSpPr>
-          <p:cNvPr id="7" name="TextBox 6"/>
-          <p:cNvSpPr txBox="1"/>
-          <p:nvPr/>
-        </p:nvSpPr>
-        <p:spPr>
-          <a:xfrm>
-            <a:off x="566928" y="1179576"/>
-            <a:ext cx="10881360" cy="347472"/>
-          </a:xfrm>
-          <a:prstGeom prst="rect">
-            <a:avLst/>
-          </a:prstGeom>
-          <a:noFill/>
-        </p:spPr>
-        <p:txBody>
-          <a:bodyPr wrap="square" lIns="0" rIns="0" tIns="0" bIns="0" anchor="ctr">
-            <a:spAutoFit/>
-          </a:bodyPr>
-          <a:lstStyle/>
-          <a:p>
-            <a:pPr algn="l"/>
-            <a:r>
-              <a:rPr sz="1300" b="0">
-                <a:solidFill>
-                  <a:srgbClr val="626A7A"/>
-                </a:solidFill>
-                <a:latin typeface="Aptos"/>
-              </a:rPr>
-              <a:t>The orchestrator ends its turn with two questions. Ask the room, then paste the answer.</a:t>
-            </a:r>
-          </a:p>
-        </p:txBody>
-      </p:sp>
-      <p:sp>
-        <p:nvSpPr>
-          <p:cNvPr id="8" name="Rounded Rectangle 7"/>
-          <p:cNvSpPr/>
-          <p:nvPr/>
-        </p:nvSpPr>
-        <p:spPr>
-          <a:xfrm>
-            <a:off x="621792" y="1664208"/>
-            <a:ext cx="6720840" cy="4343400"/>
-          </a:xfrm>
-          <a:prstGeom prst="roundRect">
-            <a:avLst/>
-          </a:prstGeom>
-          <a:solidFill>
-            <a:srgbClr val="101426"/>
-          </a:solidFill>
-          <a:ln>
-            <a:solidFill>
-              <a:srgbClr val="101426"/>
-            </a:solidFill>
-          </a:ln>
-        </p:spPr>
-        <p:style>
-          <a:lnRef idx="1">
-            <a:schemeClr val="accent1"/>
-          </a:lnRef>
-          <a:fillRef idx="3">
-            <a:schemeClr val="accent1"/>
-          </a:fillRef>
-          <a:effectRef idx="2">
-            <a:schemeClr val="accent1"/>
-          </a:effectRef>
-          <a:fontRef idx="minor">
-            <a:schemeClr val="lt1"/>
-          </a:fontRef>
-        </p:style>
-        <p:txBody>
-          <a:bodyPr rtlCol="0" anchor="ctr"/>
-          <a:lstStyle/>
-          <a:p>
-            <a:pPr algn="ctr"/>
-          </a:p>
-        </p:txBody>
-      </p:sp>
-      <p:sp>
-        <p:nvSpPr>
-          <p:cNvPr id="9" name="TextBox 8"/>
-          <p:cNvSpPr txBox="1"/>
-          <p:nvPr/>
-        </p:nvSpPr>
-        <p:spPr>
-          <a:xfrm>
-            <a:off x="914400" y="1901952"/>
-            <a:ext cx="6126480" cy="3794760"/>
-          </a:xfrm>
-          <a:prstGeom prst="rect">
-            <a:avLst/>
-          </a:prstGeom>
-          <a:noFill/>
-        </p:spPr>
-        <p:txBody>
-          <a:bodyPr wrap="square" lIns="0" rIns="0" tIns="0" bIns="0" anchor="t">
-            <a:spAutoFit/>
-          </a:bodyPr>
-          <a:lstStyle/>
-          <a:p>
-            <a:pPr algn="l"/>
-            <a:r>
-              <a:rPr sz="1150" b="0">
-                <a:solidFill>
-                  <a:srgbClr val="D9E0F4"/>
-                </a:solidFill>
-                <a:latin typeface="Courier New"/>
-              </a:rPr>
-              <a:t>It asks:</a:t>
-            </a:r>
-            <a:br/>
-            <a:r>
-              <a:rPr sz="1150" b="0">
-                <a:solidFill>
-                  <a:srgbClr val="D9E0F4"/>
-                </a:solidFill>
-                <a:latin typeface="Courier New"/>
-              </a:rPr>
-              <a:t>  gender: should "n/a" (droids) map to Other or Unknown?</a:t>
-            </a:r>
-            <a:br/>
-            <a:r>
-              <a:rPr sz="1150" b="0">
-                <a:solidFill>
-                  <a:srgbClr val="D9E0F4"/>
-                </a:solidFill>
-                <a:latin typeface="Courier New"/>
-              </a:rPr>
-              <a:t>  birthYear: unparsable values -&gt; null, or reject?</a:t>
-            </a:r>
-            <a:br/>
-            <a:r>
-              <a:rPr sz="1150" b="0">
-                <a:solidFill>
-                  <a:srgbClr val="D9E0F4"/>
-                </a:solidFill>
-                <a:latin typeface="Courier New"/>
-              </a:rPr>
-              <a:t/>
-            </a:r>
-            <a:br/>
-            <a:r>
-              <a:rPr sz="1150" b="0">
-                <a:solidFill>
-                  <a:srgbClr val="D9E0F4"/>
-                </a:solidFill>
-                <a:latin typeface="Courier New"/>
-              </a:rPr>
-              <a:t>Ask the room. Then paste (edit to match their answer):</a:t>
-            </a:r>
-            <a:br/>
-            <a:r>
-              <a:rPr sz="1150" b="0">
-                <a:solidFill>
-                  <a:srgbClr val="D9E0F4"/>
-                </a:solidFill>
-                <a:latin typeface="Courier New"/>
-              </a:rPr>
-              <a:t/>
-            </a:r>
-            <a:br/>
-            <a:r>
-              <a:rPr sz="1150" b="0">
-                <a:solidFill>
-                  <a:srgbClr val="D9E0F4"/>
-                </a:solidFill>
-                <a:latin typeface="Courier New"/>
-              </a:rPr>
-              <a:t>n/a is Other - droids are a real category, not</a:t>
-            </a:r>
-            <a:br/>
-            <a:r>
-              <a:rPr sz="1150" b="0">
-                <a:solidFill>
-                  <a:srgbClr val="D9E0F4"/>
-                </a:solidFill>
-                <a:latin typeface="Courier New"/>
-              </a:rPr>
-              <a:t>missing data. Unparsable birth years become null.</a:t>
-            </a:r>
-            <a:br/>
-            <a:r>
-              <a:rPr sz="1150" b="0">
-                <a:solidFill>
-                  <a:srgbClr val="D9E0F4"/>
-                </a:solidFill>
-                <a:latin typeface="Courier New"/>
-              </a:rPr>
-              <a:t/>
-            </a:r>
-            <a:br/>
-            <a:r>
-              <a:rPr sz="1150" b="0">
-                <a:solidFill>
-                  <a:srgbClr val="D9E0F4"/>
-                </a:solidFill>
-                <a:latin typeface="Courier New"/>
-              </a:rPr>
-              <a:t>It then runs: approve -&gt; map --check (green) -&gt;</a:t>
-            </a:r>
-            <a:br/>
-            <a:r>
-              <a:rPr sz="1150" b="0">
-                <a:solidFill>
-                  <a:srgbClr val="D9E0F4"/>
-                </a:solidFill>
-                <a:latin typeface="Courier New"/>
-              </a:rPr>
-              <a:t>generate -&gt; ai implement -&gt; connector-agent -&gt; validate --smoke</a:t>
-            </a:r>
-            <a:br/>
-            <a:r>
-              <a:rPr sz="1150" b="0">
-                <a:solidFill>
-                  <a:srgbClr val="D9E0F4"/>
-                </a:solidFill>
-                <a:latin typeface="Courier New"/>
-              </a:rPr>
-              <a:t/>
-            </a:r>
-            <a:br/>
-            <a:r>
-              <a:rPr sz="1150" b="0">
-                <a:solidFill>
-                  <a:srgbClr val="D9E0F4"/>
-                </a:solidFill>
-                <a:latin typeface="Courier New"/>
-              </a:rPr>
-              <a:t/>
-            </a:r>
-            <a:br/>
-            <a:r>
-              <a:rPr sz="1150" b="0">
-                <a:solidFill>
-                  <a:srgbClr val="D9E0F4"/>
-                </a:solidFill>
-                <a:latin typeface="Courier New"/>
-              </a:rPr>
-              <a:t/>
-            </a:r>
-            <a:br/>
-            <a:r>
-              <a:rPr sz="1150" b="0">
-                <a:solidFill>
-                  <a:srgbClr val="D9E0F4"/>
-                </a:solidFill>
-                <a:latin typeface="Courier New"/>
-              </a:rPr>
-              <a:t/>
-            </a:r>
-          </a:p>
-        </p:txBody>
-      </p:sp>
-      <p:sp>
-        <p:nvSpPr>
-          <p:cNvPr id="10" name="Rounded Rectangle 9"/>
-          <p:cNvSpPr/>
-          <p:nvPr/>
-        </p:nvSpPr>
-        <p:spPr>
-          <a:xfrm>
-            <a:off x="7726679" y="1755648"/>
-            <a:ext cx="1234440" cy="292608"/>
-          </a:xfrm>
-          <a:prstGeom prst="roundRect">
-            <a:avLst/>
-          </a:prstGeom>
-          <a:solidFill>
-            <a:srgbClr val="EEEAFE"/>
-          </a:solidFill>
-          <a:ln>
-            <a:solidFill>
-              <a:srgbClr val="EEEAFE"/>
-            </a:solidFill>
-          </a:ln>
-        </p:spPr>
-        <p:style>
-          <a:lnRef idx="1">
-            <a:schemeClr val="accent1"/>
-          </a:lnRef>
-          <a:fillRef idx="3">
-            <a:schemeClr val="accent1"/>
-          </a:fillRef>
-          <a:effectRef idx="2">
-            <a:schemeClr val="accent1"/>
-          </a:effectRef>
-          <a:fontRef idx="minor">
-            <a:schemeClr val="lt1"/>
-          </a:fontRef>
-        </p:style>
-        <p:txBody>
-          <a:bodyPr rtlCol="0" anchor="ctr"/>
-          <a:lstStyle/>
-          <a:p>
-            <a:pPr algn="ctr"/>
-          </a:p>
-        </p:txBody>
-      </p:sp>
-      <p:sp>
-        <p:nvSpPr>
-          <p:cNvPr id="11" name="TextBox 10"/>
-          <p:cNvSpPr txBox="1"/>
-          <p:nvPr/>
-        </p:nvSpPr>
-        <p:spPr>
-          <a:xfrm>
-            <a:off x="7781544" y="1773936"/>
-            <a:ext cx="1124712" cy="246888"/>
-          </a:xfrm>
-          <a:prstGeom prst="rect">
-            <a:avLst/>
-          </a:prstGeom>
-          <a:noFill/>
-        </p:spPr>
-        <p:txBody>
-          <a:bodyPr wrap="square" lIns="0" rIns="0" tIns="0" bIns="0" anchor="ctr">
-            <a:spAutoFit/>
-          </a:bodyPr>
-          <a:lstStyle/>
-          <a:p>
-            <a:pPr algn="ctr"/>
-            <a:r>
-              <a:rPr sz="900" b="1">
-                <a:solidFill>
-                  <a:srgbClr val="6D5DFB"/>
-                </a:solidFill>
-                <a:latin typeface="Aptos"/>
-              </a:rPr>
-              <a:t>WHAT IT DOES</a:t>
-            </a:r>
-          </a:p>
-        </p:txBody>
-      </p:sp>
-      <p:sp>
-        <p:nvSpPr>
-          <p:cNvPr id="12" name="TextBox 11"/>
-          <p:cNvSpPr txBox="1"/>
-          <p:nvPr/>
-        </p:nvSpPr>
-        <p:spPr>
-          <a:xfrm>
-            <a:off x="9098280" y="1737360"/>
-            <a:ext cx="2286000" cy="512064"/>
-          </a:xfrm>
-          <a:prstGeom prst="rect">
-            <a:avLst/>
-          </a:prstGeom>
-          <a:noFill/>
-        </p:spPr>
-        <p:txBody>
-          <a:bodyPr wrap="square" lIns="0" rIns="0" tIns="0" bIns="0" anchor="ctr">
-            <a:spAutoFit/>
-          </a:bodyPr>
-          <a:lstStyle/>
-          <a:p>
-            <a:pPr algn="l"/>
-            <a:r>
-              <a:rPr sz="1050" b="0">
-                <a:solidFill>
-                  <a:srgbClr val="151A2D"/>
-                </a:solidFill>
-                <a:latin typeface="Aptos"/>
-              </a:rPr>
-              <a:t>Records your words with approve, regenerates, briefs the connector agent, fills three TODO blocks, runs seven gates.</a:t>
-            </a:r>
-          </a:p>
-        </p:txBody>
-      </p:sp>
-      <p:sp>
-        <p:nvSpPr>
-          <p:cNvPr id="13" name="Rounded Rectangle 12"/>
-          <p:cNvSpPr/>
-          <p:nvPr/>
-        </p:nvSpPr>
-        <p:spPr>
-          <a:xfrm>
-            <a:off x="7726679" y="2798063"/>
-            <a:ext cx="1234440" cy="292608"/>
-          </a:xfrm>
-          <a:prstGeom prst="roundRect">
-            <a:avLst/>
-          </a:prstGeom>
-          <a:solidFill>
-            <a:srgbClr val="FFF3DB"/>
-          </a:solidFill>
-          <a:ln>
-            <a:solidFill>
-              <a:srgbClr val="FFF3DB"/>
-            </a:solidFill>
-          </a:ln>
-        </p:spPr>
-        <p:style>
-          <a:lnRef idx="1">
-            <a:schemeClr val="accent1"/>
-          </a:lnRef>
-          <a:fillRef idx="3">
-            <a:schemeClr val="accent1"/>
-          </a:fillRef>
-          <a:effectRef idx="2">
-            <a:schemeClr val="accent1"/>
-          </a:effectRef>
-          <a:fontRef idx="minor">
-            <a:schemeClr val="lt1"/>
-          </a:fontRef>
-        </p:style>
-        <p:txBody>
-          <a:bodyPr rtlCol="0" anchor="ctr"/>
-          <a:lstStyle/>
-          <a:p>
-            <a:pPr algn="ctr"/>
-          </a:p>
-        </p:txBody>
-      </p:sp>
-      <p:sp>
-        <p:nvSpPr>
-          <p:cNvPr id="14" name="TextBox 13"/>
-          <p:cNvSpPr txBox="1"/>
-          <p:nvPr/>
-        </p:nvSpPr>
-        <p:spPr>
-          <a:xfrm>
-            <a:off x="7781544" y="2816351"/>
-            <a:ext cx="1124712" cy="246888"/>
-          </a:xfrm>
-          <a:prstGeom prst="rect">
-            <a:avLst/>
-          </a:prstGeom>
-          <a:noFill/>
-        </p:spPr>
-        <p:txBody>
-          <a:bodyPr wrap="square" lIns="0" rIns="0" tIns="0" bIns="0" anchor="ctr">
-            <a:spAutoFit/>
-          </a:bodyPr>
-          <a:lstStyle/>
-          <a:p>
-            <a:pPr algn="ctr"/>
-            <a:r>
-              <a:rPr sz="900" b="1">
-                <a:solidFill>
-                  <a:srgbClr val="B56C00"/>
-                </a:solidFill>
-                <a:latin typeface="Aptos"/>
-              </a:rPr>
-              <a:t>WATCH FOR</a:t>
-            </a:r>
-          </a:p>
-        </p:txBody>
-      </p:sp>
-      <p:sp>
-        <p:nvSpPr>
-          <p:cNvPr id="15" name="TextBox 14"/>
-          <p:cNvSpPr txBox="1"/>
-          <p:nvPr/>
-        </p:nvSpPr>
-        <p:spPr>
-          <a:xfrm>
-            <a:off x="9098280" y="2779775"/>
-            <a:ext cx="2286000" cy="512064"/>
-          </a:xfrm>
-          <a:prstGeom prst="rect">
-            <a:avLst/>
-          </a:prstGeom>
-          <a:noFill/>
-        </p:spPr>
-        <p:txBody>
-          <a:bodyPr wrap="square" lIns="0" rIns="0" tIns="0" bIns="0" anchor="ctr">
-            <a:spAutoFit/>
-          </a:bodyPr>
-          <a:lstStyle/>
-          <a:p>
-            <a:pPr algn="l"/>
-            <a:r>
-              <a:rPr sz="1050" b="0">
-                <a:solidFill>
-                  <a:srgbClr val="151A2D"/>
-                </a:solidFill>
-                <a:latin typeface="Aptos"/>
-              </a:rPr>
-              <a:t>“regenerated 4, left untouched 5”; the token line; the last gate is a real API call.</a:t>
-            </a:r>
-          </a:p>
-        </p:txBody>
-      </p:sp>
-      <p:sp>
-        <p:nvSpPr>
-          <p:cNvPr id="16" name="Rounded Rectangle 15"/>
-          <p:cNvSpPr/>
-          <p:nvPr/>
-        </p:nvSpPr>
-        <p:spPr>
-          <a:xfrm>
-            <a:off x="7726679" y="3840479"/>
-            <a:ext cx="1234440" cy="292608"/>
-          </a:xfrm>
-          <a:prstGeom prst="roundRect">
-            <a:avLst/>
-          </a:prstGeom>
-          <a:solidFill>
-            <a:srgbClr val="EEEAFE"/>
-          </a:solidFill>
-          <a:ln>
-            <a:solidFill>
-              <a:srgbClr val="EEEAFE"/>
-            </a:solidFill>
-          </a:ln>
-        </p:spPr>
-        <p:style>
-          <a:lnRef idx="1">
-            <a:schemeClr val="accent1"/>
-          </a:lnRef>
-          <a:fillRef idx="3">
-            <a:schemeClr val="accent1"/>
-          </a:fillRef>
-          <a:effectRef idx="2">
-            <a:schemeClr val="accent1"/>
-          </a:effectRef>
-          <a:fontRef idx="minor">
-            <a:schemeClr val="lt1"/>
-          </a:fontRef>
-        </p:style>
-        <p:txBody>
-          <a:bodyPr rtlCol="0" anchor="ctr"/>
-          <a:lstStyle/>
-          <a:p>
-            <a:pPr algn="ctr"/>
-          </a:p>
-        </p:txBody>
-      </p:sp>
-      <p:sp>
-        <p:nvSpPr>
-          <p:cNvPr id="17" name="TextBox 16"/>
-          <p:cNvSpPr txBox="1"/>
-          <p:nvPr/>
-        </p:nvSpPr>
-        <p:spPr>
-          <a:xfrm>
-            <a:off x="7781544" y="3858767"/>
-            <a:ext cx="1124712" cy="246888"/>
-          </a:xfrm>
-          <a:prstGeom prst="rect">
-            <a:avLst/>
-          </a:prstGeom>
-          <a:noFill/>
-        </p:spPr>
-        <p:txBody>
-          <a:bodyPr wrap="square" lIns="0" rIns="0" tIns="0" bIns="0" anchor="ctr">
-            <a:spAutoFit/>
-          </a:bodyPr>
-          <a:lstStyle/>
-          <a:p>
-            <a:pPr algn="ctr"/>
-            <a:r>
-              <a:rPr sz="900" b="1">
-                <a:solidFill>
-                  <a:srgbClr val="6D5DFB"/>
-                </a:solidFill>
-                <a:latin typeface="Aptos"/>
-              </a:rPr>
-              <a:t>SAY</a:t>
-            </a:r>
-          </a:p>
-        </p:txBody>
-      </p:sp>
-      <p:sp>
-        <p:nvSpPr>
-          <p:cNvPr id="18" name="TextBox 17"/>
-          <p:cNvSpPr txBox="1"/>
-          <p:nvPr/>
-        </p:nvSpPr>
-        <p:spPr>
-          <a:xfrm>
-            <a:off x="9098280" y="3822191"/>
-            <a:ext cx="2286000" cy="512064"/>
-          </a:xfrm>
-          <a:prstGeom prst="rect">
-            <a:avLst/>
-          </a:prstGeom>
-          <a:noFill/>
-        </p:spPr>
-        <p:txBody>
-          <a:bodyPr wrap="square" lIns="0" rIns="0" tIns="0" bIns="0" anchor="ctr">
-            <a:spAutoFit/>
-          </a:bodyPr>
-          <a:lstStyle/>
-          <a:p>
-            <a:pPr algn="l"/>
-            <a:r>
-              <a:rPr sz="1050" b="0">
-                <a:solidFill>
-                  <a:srgbClr val="151A2D"/>
-                </a:solidFill>
-                <a:latin typeface="Aptos"/>
-              </a:rPr>
-              <a:t>“The decision is in the JSON with who and when — not in this chat.” Talk about slide 8 while it works.</a:t>
-            </a:r>
-          </a:p>
-        </p:txBody>
-      </p:sp>
-      <p:sp>
-        <p:nvSpPr>
-          <p:cNvPr id="19" name="Rounded Rectangle 18"/>
-          <p:cNvSpPr/>
-          <p:nvPr/>
-        </p:nvSpPr>
-        <p:spPr>
-          <a:xfrm>
-            <a:off x="7726679" y="4882896"/>
-            <a:ext cx="1234440" cy="292608"/>
-          </a:xfrm>
-          <a:prstGeom prst="roundRect">
-            <a:avLst/>
-          </a:prstGeom>
-          <a:solidFill>
-            <a:srgbClr val="EEEAFE"/>
-          </a:solidFill>
-          <a:ln>
-            <a:solidFill>
-              <a:srgbClr val="EEEAFE"/>
-            </a:solidFill>
-          </a:ln>
-        </p:spPr>
-        <p:style>
-          <a:lnRef idx="1">
-            <a:schemeClr val="accent1"/>
-          </a:lnRef>
-          <a:fillRef idx="3">
-            <a:schemeClr val="accent1"/>
-          </a:fillRef>
-          <a:effectRef idx="2">
-            <a:schemeClr val="accent1"/>
-          </a:effectRef>
-          <a:fontRef idx="minor">
-            <a:schemeClr val="lt1"/>
-          </a:fontRef>
-        </p:style>
-        <p:txBody>
-          <a:bodyPr rtlCol="0" anchor="ctr"/>
-          <a:lstStyle/>
-          <a:p>
-            <a:pPr algn="ctr"/>
-          </a:p>
-        </p:txBody>
-      </p:sp>
-      <p:sp>
-        <p:nvSpPr>
-          <p:cNvPr id="20" name="TextBox 19"/>
-          <p:cNvSpPr txBox="1"/>
-          <p:nvPr/>
-        </p:nvSpPr>
-        <p:spPr>
-          <a:xfrm>
-            <a:off x="7781544" y="4901183"/>
-            <a:ext cx="1124712" cy="246888"/>
-          </a:xfrm>
-          <a:prstGeom prst="rect">
-            <a:avLst/>
-          </a:prstGeom>
-          <a:noFill/>
-        </p:spPr>
-        <p:txBody>
-          <a:bodyPr wrap="square" lIns="0" rIns="0" tIns="0" bIns="0" anchor="ctr">
-            <a:spAutoFit/>
-          </a:bodyPr>
-          <a:lstStyle/>
-          <a:p>
-            <a:pPr algn="ctr"/>
-            <a:r>
-              <a:rPr sz="900" b="1">
-                <a:solidFill>
-                  <a:srgbClr val="6D5DFB"/>
-                </a:solidFill>
-                <a:latin typeface="Aptos"/>
-              </a:rPr>
-              <a:t>WAIT</a:t>
-            </a:r>
-          </a:p>
-        </p:txBody>
-      </p:sp>
-      <p:sp>
-        <p:nvSpPr>
-          <p:cNvPr id="21" name="TextBox 20"/>
-          <p:cNvSpPr txBox="1"/>
-          <p:nvPr/>
-        </p:nvSpPr>
-        <p:spPr>
-          <a:xfrm>
-            <a:off x="9098280" y="4864608"/>
-            <a:ext cx="2286000" cy="512064"/>
-          </a:xfrm>
-          <a:prstGeom prst="rect">
-            <a:avLst/>
-          </a:prstGeom>
-          <a:noFill/>
-        </p:spPr>
-        <p:txBody>
-          <a:bodyPr wrap="square" lIns="0" rIns="0" tIns="0" bIns="0" anchor="ctr">
-            <a:spAutoFit/>
-          </a:bodyPr>
-          <a:lstStyle/>
-          <a:p>
-            <a:pPr algn="l"/>
-            <a:r>
-              <a:rPr sz="1050" b="0">
-                <a:solidFill>
-                  <a:srgbClr val="151A2D"/>
-                </a:solidFill>
-                <a:latin typeface="Aptos"/>
-              </a:rPr>
-              <a:t>The connector-agent call is the longest: 1–3 min. Do not type.</a:t>
-            </a:r>
-          </a:p>
-        </p:txBody>
-      </p:sp>
-    </p:spTree>
-  </p:cSld>
-  <p:clrMapOvr>
-    <a:masterClrMapping/>
-  </p:clrMapOvr>
-</p:sld>
-</file>
-
-<file path=ppt/slides/slide16.xml><?xml version="1.0" encoding="utf-8"?>
-<p:sld xmlns:a="http://schemas.openxmlformats.org/drawingml/2006/main" xmlns:p="http://schemas.openxmlformats.org/presentationml/2006/main" xmlns:r="http://schemas.openxmlformats.org/officeDocument/2006/relationships">
-  <p:cSld>
-    <p:bg>
-      <p:bgPr>
-        <a:solidFill>
-          <a:srgbClr val="F7F8FC"/>
-        </a:solidFill>
-        <a:effectLst/>
-      </p:bgPr>
-    </p:bg>
-    <p:spTree>
-      <p:nvGrpSpPr>
-        <p:cNvPr id="1" name=""/>
-        <p:cNvGrpSpPr/>
-        <p:nvPr/>
-      </p:nvGrpSpPr>
-      <p:grpSpPr/>
-      <p:sp>
-        <p:nvSpPr>
-          <p:cNvPr id="2" name="Rectangle 1"/>
-          <p:cNvSpPr/>
-          <p:nvPr/>
-        </p:nvSpPr>
-        <p:spPr>
-          <a:xfrm>
-            <a:off x="0" y="0"/>
-            <a:ext cx="12191695" cy="91440"/>
-          </a:xfrm>
-          <a:prstGeom prst="rect">
-            <a:avLst/>
-          </a:prstGeom>
-          <a:solidFill>
-            <a:srgbClr val="6D5DFB"/>
-          </a:solidFill>
-          <a:ln>
-            <a:solidFill>
-              <a:srgbClr val="6D5DFB"/>
-            </a:solidFill>
-          </a:ln>
-        </p:spPr>
-        <p:style>
-          <a:lnRef idx="1">
-            <a:schemeClr val="accent1"/>
-          </a:lnRef>
-          <a:fillRef idx="3">
-            <a:schemeClr val="accent1"/>
-          </a:fillRef>
-          <a:effectRef idx="2">
-            <a:schemeClr val="accent1"/>
-          </a:effectRef>
-          <a:fontRef idx="minor">
-            <a:schemeClr val="lt1"/>
-          </a:fontRef>
-        </p:style>
-        <p:txBody>
-          <a:bodyPr rtlCol="0" anchor="ctr"/>
-          <a:lstStyle/>
-          <a:p>
-            <a:pPr algn="ctr"/>
-          </a:p>
-        </p:txBody>
-      </p:sp>
-      <p:sp>
-        <p:nvSpPr>
-          <p:cNvPr id="3" name="TextBox 2"/>
-          <p:cNvSpPr txBox="1"/>
-          <p:nvPr/>
-        </p:nvSpPr>
-        <p:spPr>
-          <a:xfrm>
-            <a:off x="502920" y="6519672"/>
-            <a:ext cx="5486400" cy="146304"/>
-          </a:xfrm>
-          <a:prstGeom prst="rect">
-            <a:avLst/>
-          </a:prstGeom>
-          <a:noFill/>
-        </p:spPr>
-        <p:txBody>
-          <a:bodyPr wrap="square" lIns="0" rIns="0" tIns="0" bIns="0" anchor="ctr">
-            <a:spAutoFit/>
-          </a:bodyPr>
-          <a:lstStyle/>
-          <a:p>
-            <a:pPr algn="l"/>
-            <a:r>
-              <a:rPr sz="750" b="0">
-                <a:solidFill>
-                  <a:srgbClr val="7B8190"/>
-                </a:solidFill>
-                <a:latin typeface="Aptos"/>
-              </a:rPr>
-              <a:t>ALLATA  |  AI-ASSISTED INTEGRATION</a:t>
-            </a:r>
-          </a:p>
-        </p:txBody>
-      </p:sp>
-      <p:sp>
-        <p:nvSpPr>
-          <p:cNvPr id="4" name="TextBox 3"/>
-          <p:cNvSpPr txBox="1"/>
-          <p:nvPr/>
-        </p:nvSpPr>
-        <p:spPr>
-          <a:xfrm>
-            <a:off x="11384280" y="6519672"/>
-            <a:ext cx="320040" cy="146304"/>
-          </a:xfrm>
-          <a:prstGeom prst="rect">
-            <a:avLst/>
-          </a:prstGeom>
-          <a:noFill/>
-        </p:spPr>
-        <p:txBody>
-          <a:bodyPr wrap="square" lIns="0" rIns="0" tIns="0" bIns="0" anchor="ctr">
-            <a:spAutoFit/>
-          </a:bodyPr>
-          <a:lstStyle/>
-          <a:p>
-            <a:pPr algn="r"/>
-            <a:r>
-              <a:rPr sz="750" b="0">
-                <a:solidFill>
-                  <a:srgbClr val="9AA0AE"/>
-                </a:solidFill>
-                <a:latin typeface="Aptos"/>
-              </a:rPr>
-              <a:t>16</a:t>
-            </a:r>
-          </a:p>
-        </p:txBody>
-      </p:sp>
-      <p:sp>
-        <p:nvSpPr>
-          <p:cNvPr id="5" name="TextBox 4"/>
-          <p:cNvSpPr txBox="1"/>
-          <p:nvPr/>
-        </p:nvSpPr>
-        <p:spPr>
-          <a:xfrm>
-            <a:off x="566928" y="310896"/>
-            <a:ext cx="3657600" cy="219456"/>
-          </a:xfrm>
-          <a:prstGeom prst="rect">
-            <a:avLst/>
-          </a:prstGeom>
-          <a:noFill/>
-        </p:spPr>
-        <p:txBody>
-          <a:bodyPr wrap="square" lIns="0" rIns="0" tIns="0" bIns="0" anchor="ctr">
-            <a:spAutoFit/>
-          </a:bodyPr>
-          <a:lstStyle/>
-          <a:p>
-            <a:pPr algn="l"/>
-            <a:r>
-              <a:rPr sz="900" b="1">
-                <a:solidFill>
-                  <a:srgbClr val="6D5DFB"/>
-                </a:solidFill>
-                <a:latin typeface="Aptos"/>
-              </a:rPr>
-              <a:t>12 — DEMO STEP 4</a:t>
-            </a:r>
-          </a:p>
-        </p:txBody>
-      </p:sp>
-      <p:sp>
-        <p:nvSpPr>
-          <p:cNvPr id="6" name="TextBox 5"/>
-          <p:cNvSpPr txBox="1"/>
-          <p:nvPr/>
-        </p:nvSpPr>
-        <p:spPr>
-          <a:xfrm>
-            <a:off x="566928" y="621792"/>
-            <a:ext cx="10972800" cy="521207"/>
-          </a:xfrm>
-          <a:prstGeom prst="rect">
-            <a:avLst/>
-          </a:prstGeom>
-          <a:noFill/>
-        </p:spPr>
-        <p:txBody>
-          <a:bodyPr wrap="square" lIns="0" rIns="0" tIns="0" bIns="0" anchor="ctr">
-            <a:spAutoFit/>
-          </a:bodyPr>
-          <a:lstStyle/>
-          <a:p>
-            <a:pPr algn="l"/>
-            <a:r>
-              <a:rPr sz="2800" b="1">
-                <a:solidFill>
-                  <a:srgbClr val="151A2D"/>
-                </a:solidFill>
-                <a:latin typeface="Aptos"/>
-              </a:rPr>
-              <a:t>The trap</a:t>
-            </a:r>
-          </a:p>
-        </p:txBody>
-      </p:sp>
-      <p:sp>
-        <p:nvSpPr>
-          <p:cNvPr id="7" name="TextBox 6"/>
-          <p:cNvSpPr txBox="1"/>
-          <p:nvPr/>
-        </p:nvSpPr>
-        <p:spPr>
-          <a:xfrm>
-            <a:off x="566928" y="1179576"/>
-            <a:ext cx="10881360" cy="347472"/>
-          </a:xfrm>
-          <a:prstGeom prst="rect">
-            <a:avLst/>
-          </a:prstGeom>
-          <a:noFill/>
-        </p:spPr>
-        <p:txBody>
-          <a:bodyPr wrap="square" lIns="0" rIns="0" tIns="0" bIns="0" anchor="ctr">
-            <a:spAutoFit/>
-          </a:bodyPr>
-          <a:lstStyle/>
-          <a:p>
-            <a:pPr algn="l"/>
-            <a:r>
-              <a:rPr sz="1300" b="0">
-                <a:solidFill>
-                  <a:srgbClr val="626A7A"/>
-                </a:solidFill>
-                <a:latin typeface="Aptos"/>
-              </a:rPr>
-              <a:t>Second prompt. The orchestrator must find the problem and escalate — not fix it.</a:t>
-            </a:r>
-          </a:p>
-        </p:txBody>
-      </p:sp>
-      <p:sp>
-        <p:nvSpPr>
-          <p:cNvPr id="8" name="Rounded Rectangle 7"/>
-          <p:cNvSpPr/>
-          <p:nvPr/>
-        </p:nvSpPr>
-        <p:spPr>
-          <a:xfrm>
-            <a:off x="621792" y="1664208"/>
-            <a:ext cx="6720840" cy="4343400"/>
-          </a:xfrm>
-          <a:prstGeom prst="roundRect">
-            <a:avLst/>
-          </a:prstGeom>
-          <a:solidFill>
-            <a:srgbClr val="101426"/>
-          </a:solidFill>
-          <a:ln>
-            <a:solidFill>
-              <a:srgbClr val="101426"/>
-            </a:solidFill>
-          </a:ln>
-        </p:spPr>
-        <p:style>
-          <a:lnRef idx="1">
-            <a:schemeClr val="accent1"/>
-          </a:lnRef>
-          <a:fillRef idx="3">
-            <a:schemeClr val="accent1"/>
-          </a:fillRef>
-          <a:effectRef idx="2">
-            <a:schemeClr val="accent1"/>
-          </a:effectRef>
-          <a:fontRef idx="minor">
-            <a:schemeClr val="lt1"/>
-          </a:fontRef>
-        </p:style>
-        <p:txBody>
-          <a:bodyPr rtlCol="0" anchor="ctr"/>
-          <a:lstStyle/>
-          <a:p>
-            <a:pPr algn="ctr"/>
-          </a:p>
-        </p:txBody>
-      </p:sp>
-      <p:sp>
-        <p:nvSpPr>
-          <p:cNvPr id="9" name="TextBox 8"/>
-          <p:cNvSpPr txBox="1"/>
-          <p:nvPr/>
-        </p:nvSpPr>
-        <p:spPr>
-          <a:xfrm>
-            <a:off x="914400" y="1901952"/>
-            <a:ext cx="6126480" cy="3794760"/>
-          </a:xfrm>
-          <a:prstGeom prst="rect">
-            <a:avLst/>
-          </a:prstGeom>
-          <a:noFill/>
-        </p:spPr>
-        <p:txBody>
-          <a:bodyPr wrap="square" lIns="0" rIns="0" tIns="0" bIns="0" anchor="t">
-            <a:spAutoFit/>
-          </a:bodyPr>
-          <a:lstStyle/>
-          <a:p>
-            <a:pPr algn="l"/>
-            <a:r>
-              <a:rPr sz="1150" b="0">
-                <a:solidFill>
-                  <a:srgbClr val="D9E0F4"/>
-                </a:solidFill>
-                <a:latin typeface="Courier New"/>
-              </a:rPr>
-              <a:t>@orchestrator Someone added film-title enrichment to</a:t>
-            </a:r>
-            <a:br/>
-            <a:r>
-              <a:rPr sz="1150" b="0">
-                <a:solidFill>
-                  <a:srgbClr val="D9E0F4"/>
-                </a:solidFill>
-                <a:latin typeface="Courier New"/>
-              </a:rPr>
-              <a:t>GetCharacterAsync - run .\demo\plant-failure.ps1,</a:t>
-            </a:r>
-            <a:br/>
-            <a:r>
-              <a:rPr sz="1150" b="0">
-                <a:solidFill>
-                  <a:srgbClr val="D9E0F4"/>
-                </a:solidFill>
-                <a:latin typeface="Courier New"/>
-              </a:rPr>
-              <a:t>then validate, and tell me what you would do.</a:t>
-            </a:r>
-            <a:br/>
-            <a:r>
-              <a:rPr sz="1150" b="0">
-                <a:solidFill>
-                  <a:srgbClr val="D9E0F4"/>
-                </a:solidFill>
-                <a:latin typeface="Courier New"/>
-              </a:rPr>
-              <a:t/>
-            </a:r>
-            <a:br/>
-            <a:r>
-              <a:rPr sz="1150" b="0">
-                <a:solidFill>
-                  <a:srgbClr val="D9E0F4"/>
-                </a:solidFill>
-                <a:latin typeface="Courier New"/>
-              </a:rPr>
-              <a:t>Expected: CONTRACT FAIL</a:t>
-            </a:r>
-            <a:br/>
-            <a:r>
-              <a:rPr sz="1150" b="0">
-                <a:solidFill>
-                  <a:srgbClr val="D9E0F4"/>
-                </a:solidFill>
-                <a:latin typeface="Courier New"/>
-              </a:rPr>
-              <a:t>  calls unallowed provider operation GetFilmAsync</a:t>
-            </a:r>
-            <a:br/>
-            <a:r>
-              <a:rPr sz="1150" b="0">
-                <a:solidFill>
-                  <a:srgbClr val="D9E0F4"/>
-                </a:solidFill>
-                <a:latin typeface="Courier New"/>
-              </a:rPr>
-              <a:t>  (allowed: GetPersonAsync, ListPeopleAsync, GetPlanetAsync)</a:t>
-            </a:r>
-            <a:br/>
-            <a:r>
-              <a:rPr sz="1150" b="0">
-                <a:solidFill>
-                  <a:srgbClr val="D9E0F4"/>
-                </a:solidFill>
-                <a:latin typeface="Courier New"/>
-              </a:rPr>
-              <a:t/>
-            </a:r>
-            <a:br/>
-            <a:r>
-              <a:rPr sz="1150" b="0">
-                <a:solidFill>
-                  <a:srgbClr val="D9E0F4"/>
-                </a:solidFill>
-                <a:latin typeface="Courier New"/>
-              </a:rPr>
-              <a:t>It lists options and asks. Paste:</a:t>
-            </a:r>
-            <a:br/>
-            <a:r>
-              <a:rPr sz="1150" b="0">
-                <a:solidFill>
-                  <a:srgbClr val="D9E0F4"/>
-                </a:solidFill>
-                <a:latin typeface="Courier New"/>
-              </a:rPr>
-              <a:t>Remove it.</a:t>
-            </a:r>
-            <a:br/>
-            <a:r>
-              <a:rPr sz="1150" b="0">
-                <a:solidFill>
-                  <a:srgbClr val="D9E0F4"/>
-                </a:solidFill>
-                <a:latin typeface="Courier New"/>
-              </a:rPr>
-              <a:t/>
-            </a:r>
-            <a:br/>
-            <a:r>
-              <a:rPr sz="1150" b="0">
-                <a:solidFill>
-                  <a:srgbClr val="D9E0F4"/>
-                </a:solidFill>
-                <a:latin typeface="Courier New"/>
-              </a:rPr>
-              <a:t/>
-            </a:r>
-            <a:br/>
-            <a:r>
-              <a:rPr sz="1150" b="0">
-                <a:solidFill>
-                  <a:srgbClr val="D9E0F4"/>
-                </a:solidFill>
-                <a:latin typeface="Courier New"/>
-              </a:rPr>
-              <a:t/>
-            </a:r>
-            <a:br/>
-            <a:r>
-              <a:rPr sz="1150" b="0">
-                <a:solidFill>
-                  <a:srgbClr val="D9E0F4"/>
-                </a:solidFill>
-                <a:latin typeface="Courier New"/>
-              </a:rPr>
-              <a:t/>
-            </a:r>
-            <a:br/>
-            <a:r>
-              <a:rPr sz="1150" b="0">
-                <a:solidFill>
-                  <a:srgbClr val="D9E0F4"/>
-                </a:solidFill>
-                <a:latin typeface="Courier New"/>
-              </a:rPr>
-              <a:t/>
-            </a:r>
-          </a:p>
-        </p:txBody>
-      </p:sp>
-      <p:sp>
-        <p:nvSpPr>
-          <p:cNvPr id="10" name="Rounded Rectangle 9"/>
-          <p:cNvSpPr/>
-          <p:nvPr/>
-        </p:nvSpPr>
-        <p:spPr>
-          <a:xfrm>
-            <a:off x="7726679" y="1755648"/>
-            <a:ext cx="1234440" cy="292608"/>
-          </a:xfrm>
-          <a:prstGeom prst="roundRect">
-            <a:avLst/>
-          </a:prstGeom>
-          <a:solidFill>
-            <a:srgbClr val="EEEAFE"/>
-          </a:solidFill>
-          <a:ln>
-            <a:solidFill>
-              <a:srgbClr val="EEEAFE"/>
-            </a:solidFill>
-          </a:ln>
-        </p:spPr>
-        <p:style>
-          <a:lnRef idx="1">
-            <a:schemeClr val="accent1"/>
-          </a:lnRef>
-          <a:fillRef idx="3">
-            <a:schemeClr val="accent1"/>
-          </a:fillRef>
-          <a:effectRef idx="2">
-            <a:schemeClr val="accent1"/>
-          </a:effectRef>
-          <a:fontRef idx="minor">
-            <a:schemeClr val="lt1"/>
-          </a:fontRef>
-        </p:style>
-        <p:txBody>
-          <a:bodyPr rtlCol="0" anchor="ctr"/>
-          <a:lstStyle/>
-          <a:p>
-            <a:pPr algn="ctr"/>
-          </a:p>
-        </p:txBody>
-      </p:sp>
-      <p:sp>
-        <p:nvSpPr>
-          <p:cNvPr id="11" name="TextBox 10"/>
-          <p:cNvSpPr txBox="1"/>
-          <p:nvPr/>
-        </p:nvSpPr>
-        <p:spPr>
-          <a:xfrm>
-            <a:off x="7781544" y="1773936"/>
-            <a:ext cx="1124712" cy="246888"/>
-          </a:xfrm>
-          <a:prstGeom prst="rect">
-            <a:avLst/>
-          </a:prstGeom>
-          <a:noFill/>
-        </p:spPr>
-        <p:txBody>
-          <a:bodyPr wrap="square" lIns="0" rIns="0" tIns="0" bIns="0" anchor="ctr">
-            <a:spAutoFit/>
-          </a:bodyPr>
-          <a:lstStyle/>
-          <a:p>
-            <a:pPr algn="ctr"/>
-            <a:r>
-              <a:rPr sz="900" b="1">
-                <a:solidFill>
-                  <a:srgbClr val="6D5DFB"/>
-                </a:solidFill>
-                <a:latin typeface="Aptos"/>
-              </a:rPr>
-              <a:t>WHAT IT DOES</a:t>
-            </a:r>
-          </a:p>
-        </p:txBody>
-      </p:sp>
-      <p:sp>
-        <p:nvSpPr>
-          <p:cNvPr id="12" name="TextBox 11"/>
-          <p:cNvSpPr txBox="1"/>
-          <p:nvPr/>
-        </p:nvSpPr>
-        <p:spPr>
-          <a:xfrm>
-            <a:off x="9098280" y="1737360"/>
-            <a:ext cx="2286000" cy="512064"/>
-          </a:xfrm>
-          <a:prstGeom prst="rect">
-            <a:avLst/>
-          </a:prstGeom>
-          <a:noFill/>
-        </p:spPr>
-        <p:txBody>
-          <a:bodyPr wrap="square" lIns="0" rIns="0" tIns="0" bIns="0" anchor="ctr">
-            <a:spAutoFit/>
-          </a:bodyPr>
-          <a:lstStyle/>
-          <a:p>
-            <a:pPr algn="l"/>
-            <a:r>
-              <a:rPr sz="1050" b="0">
-                <a:solidFill>
-                  <a:srgbClr val="151A2D"/>
-                </a:solidFill>
-                <a:latin typeface="Aptos"/>
-              </a:rPr>
-              <a:t>Adds a documented but unlisted endpoint call, runs the gates, blocks, and asks you what to do.</a:t>
-            </a:r>
-          </a:p>
-        </p:txBody>
-      </p:sp>
-      <p:sp>
-        <p:nvSpPr>
-          <p:cNvPr id="13" name="Rounded Rectangle 12"/>
-          <p:cNvSpPr/>
-          <p:nvPr/>
-        </p:nvSpPr>
-        <p:spPr>
-          <a:xfrm>
-            <a:off x="7726679" y="2798063"/>
-            <a:ext cx="1234440" cy="292608"/>
-          </a:xfrm>
-          <a:prstGeom prst="roundRect">
-            <a:avLst/>
-          </a:prstGeom>
-          <a:solidFill>
-            <a:srgbClr val="FFF3DB"/>
-          </a:solidFill>
-          <a:ln>
-            <a:solidFill>
-              <a:srgbClr val="FFF3DB"/>
-            </a:solidFill>
-          </a:ln>
-        </p:spPr>
-        <p:style>
-          <a:lnRef idx="1">
-            <a:schemeClr val="accent1"/>
-          </a:lnRef>
-          <a:fillRef idx="3">
-            <a:schemeClr val="accent1"/>
-          </a:fillRef>
-          <a:effectRef idx="2">
-            <a:schemeClr val="accent1"/>
-          </a:effectRef>
-          <a:fontRef idx="minor">
-            <a:schemeClr val="lt1"/>
-          </a:fontRef>
-        </p:style>
-        <p:txBody>
-          <a:bodyPr rtlCol="0" anchor="ctr"/>
-          <a:lstStyle/>
-          <a:p>
-            <a:pPr algn="ctr"/>
-          </a:p>
-        </p:txBody>
-      </p:sp>
-      <p:sp>
-        <p:nvSpPr>
-          <p:cNvPr id="14" name="TextBox 13"/>
-          <p:cNvSpPr txBox="1"/>
-          <p:nvPr/>
-        </p:nvSpPr>
-        <p:spPr>
-          <a:xfrm>
-            <a:off x="7781544" y="2816351"/>
-            <a:ext cx="1124712" cy="246888"/>
-          </a:xfrm>
-          <a:prstGeom prst="rect">
-            <a:avLst/>
-          </a:prstGeom>
-          <a:noFill/>
-        </p:spPr>
-        <p:txBody>
-          <a:bodyPr wrap="square" lIns="0" rIns="0" tIns="0" bIns="0" anchor="ctr">
-            <a:spAutoFit/>
-          </a:bodyPr>
-          <a:lstStyle/>
-          <a:p>
-            <a:pPr algn="ctr"/>
-            <a:r>
-              <a:rPr sz="900" b="1">
-                <a:solidFill>
-                  <a:srgbClr val="B56C00"/>
-                </a:solidFill>
-                <a:latin typeface="Aptos"/>
-              </a:rPr>
-              <a:t>WHY IT MATTERS</a:t>
-            </a:r>
-          </a:p>
-        </p:txBody>
-      </p:sp>
-      <p:sp>
-        <p:nvSpPr>
-          <p:cNvPr id="15" name="TextBox 14"/>
-          <p:cNvSpPr txBox="1"/>
-          <p:nvPr/>
-        </p:nvSpPr>
-        <p:spPr>
-          <a:xfrm>
-            <a:off x="9098280" y="2779775"/>
-            <a:ext cx="2286000" cy="512064"/>
-          </a:xfrm>
-          <a:prstGeom prst="rect">
-            <a:avLst/>
-          </a:prstGeom>
-          <a:noFill/>
-        </p:spPr>
-        <p:txBody>
-          <a:bodyPr wrap="square" lIns="0" rIns="0" tIns="0" bIns="0" anchor="ctr">
-            <a:spAutoFit/>
-          </a:bodyPr>
-          <a:lstStyle/>
-          <a:p>
-            <a:pPr algn="l"/>
-            <a:r>
-              <a:rPr sz="1050" b="0">
-                <a:solidFill>
-                  <a:srgbClr val="151A2D"/>
-                </a:solidFill>
-                <a:latin typeface="Aptos"/>
-              </a:rPr>
-              <a:t>It compiles and the tests pass. The manifest, not the code, decides what a connector may call.</a:t>
-            </a:r>
-          </a:p>
-        </p:txBody>
-      </p:sp>
-      <p:sp>
-        <p:nvSpPr>
-          <p:cNvPr id="16" name="Rounded Rectangle 15"/>
-          <p:cNvSpPr/>
-          <p:nvPr/>
-        </p:nvSpPr>
-        <p:spPr>
-          <a:xfrm>
-            <a:off x="7726679" y="3840479"/>
-            <a:ext cx="1234440" cy="292608"/>
-          </a:xfrm>
-          <a:prstGeom prst="roundRect">
-            <a:avLst/>
-          </a:prstGeom>
-          <a:solidFill>
-            <a:srgbClr val="EEEAFE"/>
-          </a:solidFill>
-          <a:ln>
-            <a:solidFill>
-              <a:srgbClr val="EEEAFE"/>
-            </a:solidFill>
-          </a:ln>
-        </p:spPr>
-        <p:style>
-          <a:lnRef idx="1">
-            <a:schemeClr val="accent1"/>
-          </a:lnRef>
-          <a:fillRef idx="3">
-            <a:schemeClr val="accent1"/>
-          </a:fillRef>
-          <a:effectRef idx="2">
-            <a:schemeClr val="accent1"/>
-          </a:effectRef>
-          <a:fontRef idx="minor">
-            <a:schemeClr val="lt1"/>
-          </a:fontRef>
-        </p:style>
-        <p:txBody>
-          <a:bodyPr rtlCol="0" anchor="ctr"/>
-          <a:lstStyle/>
-          <a:p>
-            <a:pPr algn="ctr"/>
-          </a:p>
-        </p:txBody>
-      </p:sp>
-      <p:sp>
-        <p:nvSpPr>
-          <p:cNvPr id="17" name="TextBox 16"/>
-          <p:cNvSpPr txBox="1"/>
-          <p:nvPr/>
-        </p:nvSpPr>
-        <p:spPr>
-          <a:xfrm>
-            <a:off x="7781544" y="3858767"/>
-            <a:ext cx="1124712" cy="246888"/>
-          </a:xfrm>
-          <a:prstGeom prst="rect">
-            <a:avLst/>
-          </a:prstGeom>
-          <a:noFill/>
-        </p:spPr>
-        <p:txBody>
-          <a:bodyPr wrap="square" lIns="0" rIns="0" tIns="0" bIns="0" anchor="ctr">
-            <a:spAutoFit/>
-          </a:bodyPr>
-          <a:lstStyle/>
-          <a:p>
-            <a:pPr algn="ctr"/>
-            <a:r>
-              <a:rPr sz="900" b="1">
-                <a:solidFill>
-                  <a:srgbClr val="6D5DFB"/>
-                </a:solidFill>
-                <a:latin typeface="Aptos"/>
-              </a:rPr>
-              <a:t>SAY</a:t>
-            </a:r>
-          </a:p>
-        </p:txBody>
-      </p:sp>
-      <p:sp>
-        <p:nvSpPr>
-          <p:cNvPr id="18" name="TextBox 17"/>
-          <p:cNvSpPr txBox="1"/>
-          <p:nvPr/>
-        </p:nvSpPr>
-        <p:spPr>
-          <a:xfrm>
-            <a:off x="9098280" y="3822191"/>
-            <a:ext cx="2286000" cy="512064"/>
-          </a:xfrm>
-          <a:prstGeom prst="rect">
-            <a:avLst/>
-          </a:prstGeom>
-          <a:noFill/>
-        </p:spPr>
-        <p:txBody>
-          <a:bodyPr wrap="square" lIns="0" rIns="0" tIns="0" bIns="0" anchor="ctr">
-            <a:spAutoFit/>
-          </a:bodyPr>
-          <a:lstStyle/>
-          <a:p>
-            <a:pPr algn="l"/>
-            <a:r>
-              <a:rPr sz="1050" b="0">
-                <a:solidFill>
-                  <a:srgbClr val="151A2D"/>
-                </a:solidFill>
-                <a:latin typeface="Aptos"/>
-              </a:rPr>
-              <a:t>“The endpoint works and it was still blocked — and the agent escalated instead of patching.”</a:t>
-            </a:r>
-          </a:p>
-        </p:txBody>
-      </p:sp>
-      <p:sp>
-        <p:nvSpPr>
-          <p:cNvPr id="19" name="Rounded Rectangle 18"/>
-          <p:cNvSpPr/>
-          <p:nvPr/>
-        </p:nvSpPr>
-        <p:spPr>
-          <a:xfrm>
-            <a:off x="7726679" y="4882896"/>
-            <a:ext cx="1234440" cy="292608"/>
-          </a:xfrm>
-          <a:prstGeom prst="roundRect">
-            <a:avLst/>
-          </a:prstGeom>
-          <a:solidFill>
-            <a:srgbClr val="EEEAFE"/>
-          </a:solidFill>
-          <a:ln>
-            <a:solidFill>
-              <a:srgbClr val="EEEAFE"/>
-            </a:solidFill>
-          </a:ln>
-        </p:spPr>
-        <p:style>
-          <a:lnRef idx="1">
-            <a:schemeClr val="accent1"/>
-          </a:lnRef>
-          <a:fillRef idx="3">
-            <a:schemeClr val="accent1"/>
-          </a:fillRef>
-          <a:effectRef idx="2">
-            <a:schemeClr val="accent1"/>
-          </a:effectRef>
-          <a:fontRef idx="minor">
-            <a:schemeClr val="lt1"/>
-          </a:fontRef>
-        </p:style>
-        <p:txBody>
-          <a:bodyPr rtlCol="0" anchor="ctr"/>
-          <a:lstStyle/>
-          <a:p>
-            <a:pPr algn="ctr"/>
-          </a:p>
-        </p:txBody>
-      </p:sp>
-      <p:sp>
-        <p:nvSpPr>
-          <p:cNvPr id="20" name="TextBox 19"/>
-          <p:cNvSpPr txBox="1"/>
-          <p:nvPr/>
-        </p:nvSpPr>
-        <p:spPr>
-          <a:xfrm>
-            <a:off x="7781544" y="4901183"/>
-            <a:ext cx="1124712" cy="246888"/>
-          </a:xfrm>
-          <a:prstGeom prst="rect">
-            <a:avLst/>
-          </a:prstGeom>
-          <a:noFill/>
-        </p:spPr>
-        <p:txBody>
-          <a:bodyPr wrap="square" lIns="0" rIns="0" tIns="0" bIns="0" anchor="ctr">
-            <a:spAutoFit/>
-          </a:bodyPr>
-          <a:lstStyle/>
-          <a:p>
-            <a:pPr algn="ctr"/>
-            <a:r>
-              <a:rPr sz="900" b="1">
-                <a:solidFill>
-                  <a:srgbClr val="6D5DFB"/>
-                </a:solidFill>
-                <a:latin typeface="Aptos"/>
-              </a:rPr>
-              <a:t>FALLBACK</a:t>
-            </a:r>
-          </a:p>
-        </p:txBody>
-      </p:sp>
-      <p:sp>
-        <p:nvSpPr>
-          <p:cNvPr id="21" name="TextBox 20"/>
-          <p:cNvSpPr txBox="1"/>
-          <p:nvPr/>
-        </p:nvSpPr>
-        <p:spPr>
-          <a:xfrm>
-            <a:off x="9098280" y="4864608"/>
-            <a:ext cx="2286000" cy="512064"/>
-          </a:xfrm>
-          <a:prstGeom prst="rect">
-            <a:avLst/>
-          </a:prstGeom>
-          <a:noFill/>
-        </p:spPr>
-        <p:txBody>
-          <a:bodyPr wrap="square" lIns="0" rIns="0" tIns="0" bIns="0" anchor="ctr">
-            <a:spAutoFit/>
-          </a:bodyPr>
-          <a:lstStyle/>
-          <a:p>
-            <a:pPr algn="l"/>
-            <a:r>
-              <a:rPr sz="1050" b="0">
-                <a:solidFill>
-                  <a:srgbClr val="151A2D"/>
-                </a:solidFill>
-                <a:latin typeface="Aptos"/>
-              </a:rPr>
-              <a:t>reset.ps1 -To implemented, then ask the orchestrator to run validate --smoke and report.</a:t>
-            </a:r>
-          </a:p>
-        </p:txBody>
-      </p:sp>
-    </p:spTree>
-  </p:cSld>
-  <p:clrMapOvr>
-    <a:masterClrMapping/>
-  </p:clrMapOvr>
-</p:sld>
-</file>
-
-<file path=ppt/slides/slide17.xml><?xml version="1.0" encoding="utf-8"?>
-<p:sld xmlns:a="http://schemas.openxmlformats.org/drawingml/2006/main" xmlns:p="http://schemas.openxmlformats.org/presentationml/2006/main" xmlns:r="http://schemas.openxmlformats.org/officeDocument/2006/relationships">
-  <p:cSld>
-    <p:bg>
-      <p:bgPr>
-        <a:solidFill>
           <a:srgbClr val="101426"/>
         </a:solidFill>
         <a:effectLst/>
@@ -14122,7 +8523,7 @@
                 </a:solidFill>
                 <a:latin typeface="Aptos"/>
               </a:rPr>
-              <a:t>Next step: point integration-cli at a provider spec from a current project.</a:t>
+              <a:t>Try it yourself: github.com/Ajscheuer/integration-factory-demo — the README walks through the full run.</a:t>
             </a:r>
           </a:p>
         </p:txBody>
@@ -20187,74 +14588,6 @@
                 <a:latin typeface="Aptos"/>
               </a:rPr>
               <a:t>Approval · TODO · contract · security · compile · behavior · sandbox</a:t>
-            </a:r>
-          </a:p>
-        </p:txBody>
-      </p:sp>
-      <p:sp>
-        <p:nvSpPr>
-          <p:cNvPr id="49" name="TextBox 48"/>
-          <p:cNvSpPr txBox="1"/>
-          <p:nvPr/>
-        </p:nvSpPr>
-        <p:spPr>
-          <a:xfrm>
-            <a:off x="6172200" y="5486400"/>
-            <a:ext cx="1463040" cy="228600"/>
-          </a:xfrm>
-          <a:prstGeom prst="rect">
-            <a:avLst/>
-          </a:prstGeom>
-          <a:noFill/>
-        </p:spPr>
-        <p:txBody>
-          <a:bodyPr wrap="square" lIns="0" rIns="0" tIns="0" bIns="0">
-            <a:spAutoFit/>
-          </a:bodyPr>
-          <a:lstStyle/>
-          <a:p>
-            <a:r>
-              <a:rPr sz="900" b="1">
-                <a:solidFill>
-                  <a:srgbClr val="4F46E5"/>
-                </a:solidFill>
-                <a:latin typeface="Aptos"/>
-              </a:rPr>
-              <a:t>UNDER THE HOOD</a:t>
-            </a:r>
-          </a:p>
-        </p:txBody>
-      </p:sp>
-      <p:sp>
-        <p:nvSpPr>
-          <p:cNvPr id="50" name="TextBox 49"/>
-          <p:cNvSpPr txBox="1"/>
-          <p:nvPr/>
-        </p:nvSpPr>
-        <p:spPr>
-          <a:xfrm>
-            <a:off x="6172200" y="5742432"/>
-            <a:ext cx="5394960" cy="777240"/>
-          </a:xfrm>
-          <a:prstGeom prst="rect">
-            <a:avLst/>
-          </a:prstGeom>
-          <a:noFill/>
-        </p:spPr>
-        <p:txBody>
-          <a:bodyPr wrap="square" lIns="0" rIns="0" tIns="0" bIns="0">
-            <a:spAutoFit/>
-          </a:bodyPr>
-          <a:lstStyle/>
-          <a:p>
-            <a:r>
-              <a:rPr sz="1050" b="0">
-                <a:solidFill>
-                  <a:srgbClr val="626A7A"/>
-                </a:solidFill>
-                <a:latin typeface="Aptos"/>
-              </a:rPr>
-              <a:t>Scriban templates render the skeletons, interfaces and DI wiring — the same engine as our backend codegen CLI. NSwag generates the provider client and our models from the two OpenAPI specs. System.CommandLine parses the commands. The gates and the AI briefs are plain C# in the same tool.</a:t>
             </a:r>
           </a:p>
         </p:txBody>
